--- a/RecFilmsUA3.pptx
+++ b/RecFilmsUA3.pptx
@@ -109,7 +109,57 @@
       </a:defRPr>
     </a:lvl9pPr>
   </p:defaultTextStyle>
+  <p:extLst>
+    <p:ext uri="{EFAFB233-063F-42B5-8137-9DF3F51BA10A}">
+      <p15:sldGuideLst xmlns:p15="http://schemas.microsoft.com/office/powerpoint/2012/main"/>
+    </p:ext>
+  </p:extLst>
 </p:presentation>
+</file>
+
+<file path=ppt/changesInfos/changesInfo1.xml><?xml version="1.0" encoding="utf-8"?>
+<pc:chgInfo xmlns:a="http://schemas.openxmlformats.org/drawingml/2006/main" xmlns:r="http://schemas.openxmlformats.org/officeDocument/2006/relationships" xmlns:ac="http://schemas.microsoft.com/office/drawing/2013/main/command" xmlns:pc="http://schemas.microsoft.com/office/powerpoint/2013/main/command">
+  <pc:docChgLst>
+    <pc:chgData name="alex seguin" userId="c47c39593cf1707d" providerId="LiveId" clId="{56C82717-B78C-4079-A034-267DC212A18F}"/>
+    <pc:docChg chg="modSld">
+      <pc:chgData name="alex seguin" userId="c47c39593cf1707d" providerId="LiveId" clId="{56C82717-B78C-4079-A034-267DC212A18F}" dt="2026-04-17T21:46:06.265" v="22" actId="1076"/>
+      <pc:docMkLst>
+        <pc:docMk/>
+      </pc:docMkLst>
+      <pc:sldChg chg="addSp modSp mod">
+        <pc:chgData name="alex seguin" userId="c47c39593cf1707d" providerId="LiveId" clId="{56C82717-B78C-4079-A034-267DC212A18F}" dt="2026-04-17T21:46:06.265" v="22" actId="1076"/>
+        <pc:sldMkLst>
+          <pc:docMk/>
+          <pc:sldMk cId="2558940672" sldId="260"/>
+        </pc:sldMkLst>
+        <pc:picChg chg="add mod">
+          <ac:chgData name="alex seguin" userId="c47c39593cf1707d" providerId="LiveId" clId="{56C82717-B78C-4079-A034-267DC212A18F}" dt="2026-04-17T21:46:06.265" v="22" actId="1076"/>
+          <ac:picMkLst>
+            <pc:docMk/>
+            <pc:sldMk cId="2558940672" sldId="260"/>
+            <ac:picMk id="6" creationId="{FFB4D75C-C17D-C338-2A64-178F27F655E1}"/>
+          </ac:picMkLst>
+        </pc:picChg>
+        <pc:picChg chg="mod">
+          <ac:chgData name="alex seguin" userId="c47c39593cf1707d" providerId="LiveId" clId="{56C82717-B78C-4079-A034-267DC212A18F}" dt="2026-04-17T21:45:54.419" v="20" actId="1076"/>
+          <ac:picMkLst>
+            <pc:docMk/>
+            <pc:sldMk cId="2558940672" sldId="260"/>
+            <ac:picMk id="8" creationId="{D52D0E8F-BC5D-39C5-D53A-46FD22FD9DFE}"/>
+          </ac:picMkLst>
+        </pc:picChg>
+        <pc:picChg chg="add mod">
+          <ac:chgData name="alex seguin" userId="c47c39593cf1707d" providerId="LiveId" clId="{56C82717-B78C-4079-A034-267DC212A18F}" dt="2026-04-17T21:46:03.222" v="21" actId="1076"/>
+          <ac:picMkLst>
+            <pc:docMk/>
+            <pc:sldMk cId="2558940672" sldId="260"/>
+            <ac:picMk id="9" creationId="{A75F97D1-FF1B-0D2E-101D-273738608C44}"/>
+          </ac:picMkLst>
+        </pc:picChg>
+      </pc:sldChg>
+    </pc:docChg>
+  </pc:docChgLst>
+</pc:chgInfo>
 </file>
 
 <file path=ppt/slideLayouts/slideLayout1.xml><?xml version="1.0" encoding="utf-8"?>
@@ -2322,8 +2372,8 @@
         </p:blipFill>
         <p:spPr>
           <a:xfrm>
-            <a:off x="5168275" y="0"/>
-            <a:ext cx="7152366" cy="6953461"/>
+            <a:off x="6357151" y="83746"/>
+            <a:ext cx="4644224" cy="4004426"/>
           </a:xfrm>
           <a:prstGeom prst="rect">
             <a:avLst/>
@@ -2334,6 +2384,66 @@
           <a:effectLst>
             <a:softEdge rad="112500"/>
           </a:effectLst>
+        </p:spPr>
+      </p:pic>
+      <p:pic>
+        <p:nvPicPr>
+          <p:cNvPr id="6" name="Image 5">
+            <a:extLst>
+              <a:ext uri="{FF2B5EF4-FFF2-40B4-BE49-F238E27FC236}">
+                <a16:creationId xmlns:a16="http://schemas.microsoft.com/office/drawing/2014/main" id="{FFB4D75C-C17D-C338-2A64-178F27F655E1}"/>
+              </a:ext>
+            </a:extLst>
+          </p:cNvPr>
+          <p:cNvPicPr>
+            <a:picLocks noChangeAspect="1"/>
+          </p:cNvPicPr>
+          <p:nvPr/>
+        </p:nvPicPr>
+        <p:blipFill>
+          <a:blip r:embed="rId4"/>
+          <a:stretch>
+            <a:fillRect/>
+          </a:stretch>
+        </p:blipFill>
+        <p:spPr>
+          <a:xfrm>
+            <a:off x="5519530" y="5759661"/>
+            <a:ext cx="6319466" cy="1014593"/>
+          </a:xfrm>
+          <a:prstGeom prst="rect">
+            <a:avLst/>
+          </a:prstGeom>
+        </p:spPr>
+      </p:pic>
+      <p:pic>
+        <p:nvPicPr>
+          <p:cNvPr id="9" name="Image 8">
+            <a:extLst>
+              <a:ext uri="{FF2B5EF4-FFF2-40B4-BE49-F238E27FC236}">
+                <a16:creationId xmlns:a16="http://schemas.microsoft.com/office/drawing/2014/main" id="{A75F97D1-FF1B-0D2E-101D-273738608C44}"/>
+              </a:ext>
+            </a:extLst>
+          </p:cNvPr>
+          <p:cNvPicPr>
+            <a:picLocks noChangeAspect="1"/>
+          </p:cNvPicPr>
+          <p:nvPr/>
+        </p:nvPicPr>
+        <p:blipFill>
+          <a:blip r:embed="rId5"/>
+          <a:stretch>
+            <a:fillRect/>
+          </a:stretch>
+        </p:blipFill>
+        <p:spPr>
+          <a:xfrm>
+            <a:off x="5935717" y="4115955"/>
+            <a:ext cx="5487166" cy="1552792"/>
+          </a:xfrm>
+          <a:prstGeom prst="rect">
+            <a:avLst/>
+          </a:prstGeom>
         </p:spPr>
       </p:pic>
     </p:spTree>

--- a/RecFilmsUA3.pptx
+++ b/RecFilmsUA3.pptx
@@ -121,17 +121,25 @@
 <pc:chgInfo xmlns:a="http://schemas.openxmlformats.org/drawingml/2006/main" xmlns:r="http://schemas.openxmlformats.org/officeDocument/2006/relationships" xmlns:ac="http://schemas.microsoft.com/office/drawing/2013/main/command" xmlns:pc="http://schemas.microsoft.com/office/powerpoint/2013/main/command">
   <pc:docChgLst>
     <pc:chgData name="alex seguin" userId="c47c39593cf1707d" providerId="LiveId" clId="{56C82717-B78C-4079-A034-267DC212A18F}"/>
-    <pc:docChg chg="modSld">
-      <pc:chgData name="alex seguin" userId="c47c39593cf1707d" providerId="LiveId" clId="{56C82717-B78C-4079-A034-267DC212A18F}" dt="2026-04-17T21:46:06.265" v="22" actId="1076"/>
+    <pc:docChg chg="custSel modSld">
+      <pc:chgData name="alex seguin" userId="c47c39593cf1707d" providerId="LiveId" clId="{56C82717-B78C-4079-A034-267DC212A18F}" dt="2026-04-17T22:16:22.318" v="49" actId="20577"/>
       <pc:docMkLst>
         <pc:docMk/>
       </pc:docMkLst>
       <pc:sldChg chg="addSp modSp mod">
-        <pc:chgData name="alex seguin" userId="c47c39593cf1707d" providerId="LiveId" clId="{56C82717-B78C-4079-A034-267DC212A18F}" dt="2026-04-17T21:46:06.265" v="22" actId="1076"/>
+        <pc:chgData name="alex seguin" userId="c47c39593cf1707d" providerId="LiveId" clId="{56C82717-B78C-4079-A034-267DC212A18F}" dt="2026-04-17T22:16:22.318" v="49" actId="20577"/>
         <pc:sldMkLst>
           <pc:docMk/>
           <pc:sldMk cId="2558940672" sldId="260"/>
         </pc:sldMkLst>
+        <pc:spChg chg="mod">
+          <ac:chgData name="alex seguin" userId="c47c39593cf1707d" providerId="LiveId" clId="{56C82717-B78C-4079-A034-267DC212A18F}" dt="2026-04-17T22:16:22.318" v="49" actId="20577"/>
+          <ac:spMkLst>
+            <pc:docMk/>
+            <pc:sldMk cId="2558940672" sldId="260"/>
+            <ac:spMk id="3" creationId="{C85BE854-1E37-43EA-67EB-54A346412B80}"/>
+          </ac:spMkLst>
+        </pc:spChg>
         <pc:picChg chg="add mod">
           <ac:chgData name="alex seguin" userId="c47c39593cf1707d" providerId="LiveId" clId="{56C82717-B78C-4079-A034-267DC212A18F}" dt="2026-04-17T21:46:06.265" v="22" actId="1076"/>
           <ac:picMkLst>
@@ -2344,9 +2352,30 @@
           <a:p>
             <a:pPr algn="l"/>
             <a:r>
+              <a:rPr lang="en-CA" sz="2200" dirty="0"/>
+              <a:t>Prend </a:t>
+            </a:r>
+            <a:r>
               <a:rPr lang="en-CA" sz="2200"/>
-              <a:t>Limites modèles, data leak et changement en binaire</a:t>
-            </a:r>
+              <a:t>note moyen + haut, </a:t>
+            </a:r>
+            <a:r>
+              <a:rPr lang="en-CA" sz="2200" dirty="0"/>
+              <a:t>data leak et changement </a:t>
+            </a:r>
+            <a:r>
+              <a:rPr lang="en-CA" sz="2200" dirty="0" err="1"/>
+              <a:t>en</a:t>
+            </a:r>
+            <a:r>
+              <a:rPr lang="en-CA" sz="2200" dirty="0"/>
+              <a:t> </a:t>
+            </a:r>
+            <a:r>
+              <a:rPr lang="en-CA" sz="2200" dirty="0" err="1"/>
+              <a:t>binaire</a:t>
+            </a:r>
+            <a:endParaRPr lang="en-CA" sz="2200" dirty="0"/>
           </a:p>
         </p:txBody>
       </p:sp>

--- a/RecFilmsUA3.pptx
+++ b/RecFilmsUA3.pptx
@@ -4,6 +4,9 @@
   <p:sldMasterIdLst>
     <p:sldMasterId id="2147483713" r:id="rId1"/>
   </p:sldMasterIdLst>
+  <p:notesMasterIdLst>
+    <p:notesMasterId r:id="rId10"/>
+  </p:notesMasterIdLst>
   <p:sldIdLst>
     <p:sldId id="256" r:id="rId2"/>
     <p:sldId id="259" r:id="rId3"/>
@@ -11,6 +14,8 @@
     <p:sldId id="260" r:id="rId5"/>
     <p:sldId id="261" r:id="rId6"/>
     <p:sldId id="263" r:id="rId7"/>
+    <p:sldId id="264" r:id="rId8"/>
+    <p:sldId id="265" r:id="rId9"/>
   </p:sldIdLst>
   <p:sldSz cx="12192000" cy="6858000"/>
   <p:notesSz cx="6858000" cy="9144000"/>
@@ -170,6 +175,440 @@
 </pc:chgInfo>
 </file>
 
+<file path=ppt/notesMasters/notesMaster1.xml><?xml version="1.0" encoding="utf-8"?>
+<p:notesMaster xmlns:a="http://schemas.openxmlformats.org/drawingml/2006/main" xmlns:r="http://schemas.openxmlformats.org/officeDocument/2006/relationships" xmlns:p="http://schemas.openxmlformats.org/presentationml/2006/main">
+  <p:cSld>
+    <p:bg>
+      <p:bgRef idx="1001">
+        <a:schemeClr val="bg1"/>
+      </p:bgRef>
+    </p:bg>
+    <p:spTree>
+      <p:nvGrpSpPr>
+        <p:cNvPr id="1" name=""/>
+        <p:cNvGrpSpPr/>
+        <p:nvPr/>
+      </p:nvGrpSpPr>
+      <p:grpSpPr>
+        <a:xfrm>
+          <a:off x="0" y="0"/>
+          <a:ext cx="0" cy="0"/>
+          <a:chOff x="0" y="0"/>
+          <a:chExt cx="0" cy="0"/>
+        </a:xfrm>
+      </p:grpSpPr>
+      <p:sp>
+        <p:nvSpPr>
+          <p:cNvPr id="2" name="Espace réservé de l'en-tête 1"/>
+          <p:cNvSpPr>
+            <a:spLocks noGrp="1"/>
+          </p:cNvSpPr>
+          <p:nvPr>
+            <p:ph type="hdr" sz="quarter"/>
+          </p:nvPr>
+        </p:nvSpPr>
+        <p:spPr>
+          <a:xfrm>
+            <a:off x="0" y="0"/>
+            <a:ext cx="2971800" cy="458788"/>
+          </a:xfrm>
+          <a:prstGeom prst="rect">
+            <a:avLst/>
+          </a:prstGeom>
+        </p:spPr>
+        <p:txBody>
+          <a:bodyPr vert="horz" lIns="91440" tIns="45720" rIns="91440" bIns="45720" rtlCol="0"/>
+          <a:lstStyle>
+            <a:lvl1pPr algn="l">
+              <a:defRPr sz="1200"/>
+            </a:lvl1pPr>
+          </a:lstStyle>
+          <a:p>
+            <a:endParaRPr lang="en-CA"/>
+          </a:p>
+        </p:txBody>
+      </p:sp>
+      <p:sp>
+        <p:nvSpPr>
+          <p:cNvPr id="3" name="Espace réservé de la date 2"/>
+          <p:cNvSpPr>
+            <a:spLocks noGrp="1"/>
+          </p:cNvSpPr>
+          <p:nvPr>
+            <p:ph type="dt" idx="1"/>
+          </p:nvPr>
+        </p:nvSpPr>
+        <p:spPr>
+          <a:xfrm>
+            <a:off x="3884613" y="0"/>
+            <a:ext cx="2971800" cy="458788"/>
+          </a:xfrm>
+          <a:prstGeom prst="rect">
+            <a:avLst/>
+          </a:prstGeom>
+        </p:spPr>
+        <p:txBody>
+          <a:bodyPr vert="horz" lIns="91440" tIns="45720" rIns="91440" bIns="45720" rtlCol="0"/>
+          <a:lstStyle>
+            <a:lvl1pPr algn="r">
+              <a:defRPr sz="1200"/>
+            </a:lvl1pPr>
+          </a:lstStyle>
+          <a:p>
+            <a:fld id="{A92E5350-3EDC-40D8-A7EE-3A904327B402}" type="datetimeFigureOut">
+              <a:rPr lang="en-CA" smtClean="0"/>
+              <a:t>2026-04-18</a:t>
+            </a:fld>
+            <a:endParaRPr lang="en-CA"/>
+          </a:p>
+        </p:txBody>
+      </p:sp>
+      <p:sp>
+        <p:nvSpPr>
+          <p:cNvPr id="4" name="Espace réservé de l'image des diapositives 3"/>
+          <p:cNvSpPr>
+            <a:spLocks noGrp="1" noRot="1" noChangeAspect="1"/>
+          </p:cNvSpPr>
+          <p:nvPr>
+            <p:ph type="sldImg" idx="2"/>
+          </p:nvPr>
+        </p:nvSpPr>
+        <p:spPr>
+          <a:xfrm>
+            <a:off x="685800" y="1143000"/>
+            <a:ext cx="5486400" cy="3086100"/>
+          </a:xfrm>
+          <a:prstGeom prst="rect">
+            <a:avLst/>
+          </a:prstGeom>
+          <a:noFill/>
+          <a:ln w="12700">
+            <a:solidFill>
+              <a:prstClr val="black"/>
+            </a:solidFill>
+          </a:ln>
+        </p:spPr>
+        <p:txBody>
+          <a:bodyPr vert="horz" lIns="91440" tIns="45720" rIns="91440" bIns="45720" rtlCol="0" anchor="ctr"/>
+          <a:lstStyle/>
+          <a:p>
+            <a:endParaRPr lang="en-CA"/>
+          </a:p>
+        </p:txBody>
+      </p:sp>
+      <p:sp>
+        <p:nvSpPr>
+          <p:cNvPr id="5" name="Espace réservé des notes 4"/>
+          <p:cNvSpPr>
+            <a:spLocks noGrp="1"/>
+          </p:cNvSpPr>
+          <p:nvPr>
+            <p:ph type="body" sz="quarter" idx="3"/>
+          </p:nvPr>
+        </p:nvSpPr>
+        <p:spPr>
+          <a:xfrm>
+            <a:off x="685800" y="4400550"/>
+            <a:ext cx="5486400" cy="3600450"/>
+          </a:xfrm>
+          <a:prstGeom prst="rect">
+            <a:avLst/>
+          </a:prstGeom>
+        </p:spPr>
+        <p:txBody>
+          <a:bodyPr vert="horz" lIns="91440" tIns="45720" rIns="91440" bIns="45720" rtlCol="0"/>
+          <a:lstStyle/>
+          <a:p>
+            <a:pPr lvl="0"/>
+            <a:r>
+              <a:rPr lang="fr-FR"/>
+              <a:t>Cliquez pour modifier les styles du texte du masque</a:t>
+            </a:r>
+          </a:p>
+          <a:p>
+            <a:pPr lvl="1"/>
+            <a:r>
+              <a:rPr lang="fr-FR"/>
+              <a:t>Deuxième niveau</a:t>
+            </a:r>
+          </a:p>
+          <a:p>
+            <a:pPr lvl="2"/>
+            <a:r>
+              <a:rPr lang="fr-FR"/>
+              <a:t>Troisième niveau</a:t>
+            </a:r>
+          </a:p>
+          <a:p>
+            <a:pPr lvl="3"/>
+            <a:r>
+              <a:rPr lang="fr-FR"/>
+              <a:t>Quatrième niveau</a:t>
+            </a:r>
+          </a:p>
+          <a:p>
+            <a:pPr lvl="4"/>
+            <a:r>
+              <a:rPr lang="fr-FR"/>
+              <a:t>Cinquième niveau</a:t>
+            </a:r>
+            <a:endParaRPr lang="en-CA"/>
+          </a:p>
+        </p:txBody>
+      </p:sp>
+      <p:sp>
+        <p:nvSpPr>
+          <p:cNvPr id="6" name="Espace réservé du pied de page 5"/>
+          <p:cNvSpPr>
+            <a:spLocks noGrp="1"/>
+          </p:cNvSpPr>
+          <p:nvPr>
+            <p:ph type="ftr" sz="quarter" idx="4"/>
+          </p:nvPr>
+        </p:nvSpPr>
+        <p:spPr>
+          <a:xfrm>
+            <a:off x="0" y="8685213"/>
+            <a:ext cx="2971800" cy="458787"/>
+          </a:xfrm>
+          <a:prstGeom prst="rect">
+            <a:avLst/>
+          </a:prstGeom>
+        </p:spPr>
+        <p:txBody>
+          <a:bodyPr vert="horz" lIns="91440" tIns="45720" rIns="91440" bIns="45720" rtlCol="0" anchor="b"/>
+          <a:lstStyle>
+            <a:lvl1pPr algn="l">
+              <a:defRPr sz="1200"/>
+            </a:lvl1pPr>
+          </a:lstStyle>
+          <a:p>
+            <a:endParaRPr lang="en-CA"/>
+          </a:p>
+        </p:txBody>
+      </p:sp>
+      <p:sp>
+        <p:nvSpPr>
+          <p:cNvPr id="7" name="Espace réservé du numéro de diapositive 6"/>
+          <p:cNvSpPr>
+            <a:spLocks noGrp="1"/>
+          </p:cNvSpPr>
+          <p:nvPr>
+            <p:ph type="sldNum" sz="quarter" idx="5"/>
+          </p:nvPr>
+        </p:nvSpPr>
+        <p:spPr>
+          <a:xfrm>
+            <a:off x="3884613" y="8685213"/>
+            <a:ext cx="2971800" cy="458787"/>
+          </a:xfrm>
+          <a:prstGeom prst="rect">
+            <a:avLst/>
+          </a:prstGeom>
+        </p:spPr>
+        <p:txBody>
+          <a:bodyPr vert="horz" lIns="91440" tIns="45720" rIns="91440" bIns="45720" rtlCol="0" anchor="b"/>
+          <a:lstStyle>
+            <a:lvl1pPr algn="r">
+              <a:defRPr sz="1200"/>
+            </a:lvl1pPr>
+          </a:lstStyle>
+          <a:p>
+            <a:fld id="{41291D9F-149D-4022-B9FD-6A3CE887ACEA}" type="slidenum">
+              <a:rPr lang="en-CA" smtClean="0"/>
+              <a:t>‹N°›</a:t>
+            </a:fld>
+            <a:endParaRPr lang="en-CA"/>
+          </a:p>
+        </p:txBody>
+      </p:sp>
+    </p:spTree>
+    <p:extLst>
+      <p:ext uri="{BB962C8B-B14F-4D97-AF65-F5344CB8AC3E}">
+        <p14:creationId xmlns:p14="http://schemas.microsoft.com/office/powerpoint/2010/main" val="812831205"/>
+      </p:ext>
+    </p:extLst>
+  </p:cSld>
+  <p:clrMap bg1="lt1" tx1="dk1" bg2="lt2" tx2="dk2" accent1="accent1" accent2="accent2" accent3="accent3" accent4="accent4" accent5="accent5" accent6="accent6" hlink="hlink" folHlink="folHlink"/>
+  <p:notesStyle>
+    <a:lvl1pPr marL="0" algn="l" defTabSz="914400" rtl="0" eaLnBrk="1" latinLnBrk="0" hangingPunct="1">
+      <a:defRPr sz="1200" kern="1200">
+        <a:solidFill>
+          <a:schemeClr val="tx1"/>
+        </a:solidFill>
+        <a:latin typeface="+mn-lt"/>
+        <a:ea typeface="+mn-ea"/>
+        <a:cs typeface="+mn-cs"/>
+      </a:defRPr>
+    </a:lvl1pPr>
+    <a:lvl2pPr marL="457200" algn="l" defTabSz="914400" rtl="0" eaLnBrk="1" latinLnBrk="0" hangingPunct="1">
+      <a:defRPr sz="1200" kern="1200">
+        <a:solidFill>
+          <a:schemeClr val="tx1"/>
+        </a:solidFill>
+        <a:latin typeface="+mn-lt"/>
+        <a:ea typeface="+mn-ea"/>
+        <a:cs typeface="+mn-cs"/>
+      </a:defRPr>
+    </a:lvl2pPr>
+    <a:lvl3pPr marL="914400" algn="l" defTabSz="914400" rtl="0" eaLnBrk="1" latinLnBrk="0" hangingPunct="1">
+      <a:defRPr sz="1200" kern="1200">
+        <a:solidFill>
+          <a:schemeClr val="tx1"/>
+        </a:solidFill>
+        <a:latin typeface="+mn-lt"/>
+        <a:ea typeface="+mn-ea"/>
+        <a:cs typeface="+mn-cs"/>
+      </a:defRPr>
+    </a:lvl3pPr>
+    <a:lvl4pPr marL="1371600" algn="l" defTabSz="914400" rtl="0" eaLnBrk="1" latinLnBrk="0" hangingPunct="1">
+      <a:defRPr sz="1200" kern="1200">
+        <a:solidFill>
+          <a:schemeClr val="tx1"/>
+        </a:solidFill>
+        <a:latin typeface="+mn-lt"/>
+        <a:ea typeface="+mn-ea"/>
+        <a:cs typeface="+mn-cs"/>
+      </a:defRPr>
+    </a:lvl4pPr>
+    <a:lvl5pPr marL="1828800" algn="l" defTabSz="914400" rtl="0" eaLnBrk="1" latinLnBrk="0" hangingPunct="1">
+      <a:defRPr sz="1200" kern="1200">
+        <a:solidFill>
+          <a:schemeClr val="tx1"/>
+        </a:solidFill>
+        <a:latin typeface="+mn-lt"/>
+        <a:ea typeface="+mn-ea"/>
+        <a:cs typeface="+mn-cs"/>
+      </a:defRPr>
+    </a:lvl5pPr>
+    <a:lvl6pPr marL="2286000" algn="l" defTabSz="914400" rtl="0" eaLnBrk="1" latinLnBrk="0" hangingPunct="1">
+      <a:defRPr sz="1200" kern="1200">
+        <a:solidFill>
+          <a:schemeClr val="tx1"/>
+        </a:solidFill>
+        <a:latin typeface="+mn-lt"/>
+        <a:ea typeface="+mn-ea"/>
+        <a:cs typeface="+mn-cs"/>
+      </a:defRPr>
+    </a:lvl6pPr>
+    <a:lvl7pPr marL="2743200" algn="l" defTabSz="914400" rtl="0" eaLnBrk="1" latinLnBrk="0" hangingPunct="1">
+      <a:defRPr sz="1200" kern="1200">
+        <a:solidFill>
+          <a:schemeClr val="tx1"/>
+        </a:solidFill>
+        <a:latin typeface="+mn-lt"/>
+        <a:ea typeface="+mn-ea"/>
+        <a:cs typeface="+mn-cs"/>
+      </a:defRPr>
+    </a:lvl7pPr>
+    <a:lvl8pPr marL="3200400" algn="l" defTabSz="914400" rtl="0" eaLnBrk="1" latinLnBrk="0" hangingPunct="1">
+      <a:defRPr sz="1200" kern="1200">
+        <a:solidFill>
+          <a:schemeClr val="tx1"/>
+        </a:solidFill>
+        <a:latin typeface="+mn-lt"/>
+        <a:ea typeface="+mn-ea"/>
+        <a:cs typeface="+mn-cs"/>
+      </a:defRPr>
+    </a:lvl8pPr>
+    <a:lvl9pPr marL="3657600" algn="l" defTabSz="914400" rtl="0" eaLnBrk="1" latinLnBrk="0" hangingPunct="1">
+      <a:defRPr sz="1200" kern="1200">
+        <a:solidFill>
+          <a:schemeClr val="tx1"/>
+        </a:solidFill>
+        <a:latin typeface="+mn-lt"/>
+        <a:ea typeface="+mn-ea"/>
+        <a:cs typeface="+mn-cs"/>
+      </a:defRPr>
+    </a:lvl9pPr>
+  </p:notesStyle>
+</p:notesMaster>
+</file>
+
+<file path=ppt/notesSlides/notesSlide1.xml><?xml version="1.0" encoding="utf-8"?>
+<p:notes xmlns:a="http://schemas.openxmlformats.org/drawingml/2006/main" xmlns:r="http://schemas.openxmlformats.org/officeDocument/2006/relationships" xmlns:p="http://schemas.openxmlformats.org/presentationml/2006/main">
+  <p:cSld>
+    <p:spTree>
+      <p:nvGrpSpPr>
+        <p:cNvPr id="1" name=""/>
+        <p:cNvGrpSpPr/>
+        <p:nvPr/>
+      </p:nvGrpSpPr>
+      <p:grpSpPr>
+        <a:xfrm>
+          <a:off x="0" y="0"/>
+          <a:ext cx="0" cy="0"/>
+          <a:chOff x="0" y="0"/>
+          <a:chExt cx="0" cy="0"/>
+        </a:xfrm>
+      </p:grpSpPr>
+      <p:sp>
+        <p:nvSpPr>
+          <p:cNvPr id="2" name="Espace réservé de l'image des diapositives 1"/>
+          <p:cNvSpPr>
+            <a:spLocks noGrp="1" noRot="1" noChangeAspect="1"/>
+          </p:cNvSpPr>
+          <p:nvPr>
+            <p:ph type="sldImg"/>
+          </p:nvPr>
+        </p:nvSpPr>
+        <p:spPr/>
+      </p:sp>
+      <p:sp>
+        <p:nvSpPr>
+          <p:cNvPr id="3" name="Espace réservé des notes 2"/>
+          <p:cNvSpPr>
+            <a:spLocks noGrp="1"/>
+          </p:cNvSpPr>
+          <p:nvPr>
+            <p:ph type="body" idx="1"/>
+          </p:nvPr>
+        </p:nvSpPr>
+        <p:spPr/>
+        <p:txBody>
+          <a:bodyPr/>
+          <a:lstStyle/>
+          <a:p>
+            <a:endParaRPr lang="en-CA" dirty="0"/>
+          </a:p>
+        </p:txBody>
+      </p:sp>
+      <p:sp>
+        <p:nvSpPr>
+          <p:cNvPr id="4" name="Espace réservé du numéro de diapositive 3"/>
+          <p:cNvSpPr>
+            <a:spLocks noGrp="1"/>
+          </p:cNvSpPr>
+          <p:nvPr>
+            <p:ph type="sldNum" sz="quarter" idx="5"/>
+          </p:nvPr>
+        </p:nvSpPr>
+        <p:spPr/>
+        <p:txBody>
+          <a:bodyPr/>
+          <a:lstStyle/>
+          <a:p>
+            <a:fld id="{41291D9F-149D-4022-B9FD-6A3CE887ACEA}" type="slidenum">
+              <a:rPr lang="en-CA" smtClean="0"/>
+              <a:t>7</a:t>
+            </a:fld>
+            <a:endParaRPr lang="en-CA"/>
+          </a:p>
+        </p:txBody>
+      </p:sp>
+    </p:spTree>
+    <p:extLst>
+      <p:ext uri="{BB962C8B-B14F-4D97-AF65-F5344CB8AC3E}">
+        <p14:creationId xmlns:p14="http://schemas.microsoft.com/office/powerpoint/2010/main" val="2292507843"/>
+      </p:ext>
+    </p:extLst>
+  </p:cSld>
+  <p:clrMapOvr>
+    <a:masterClrMapping/>
+  </p:clrMapOvr>
+</p:notes>
+</file>
+
 <file path=ppt/slideLayouts/slideLayout1.xml><?xml version="1.0" encoding="utf-8"?>
 <p:sldLayout xmlns:a="http://schemas.openxmlformats.org/drawingml/2006/main" xmlns:r="http://schemas.openxmlformats.org/officeDocument/2006/relationships" xmlns:p="http://schemas.openxmlformats.org/presentationml/2006/main" type="title" preserve="1">
   <p:cSld name="Title Slide">
@@ -321,7 +760,7 @@
           <a:p>
             <a:fld id="{C128FA71-3A18-48C0-980F-4B68F7F63042}" type="datetime1">
               <a:rPr lang="en-US" smtClean="0"/>
-              <a:t>4/17/2026</a:t>
+              <a:t>4/18/2026</a:t>
             </a:fld>
             <a:endParaRPr lang="en-US"/>
           </a:p>
@@ -560,7 +999,7 @@
           <a:p>
             <a:fld id="{67F45AC6-C491-4585-A584-9CE2AF7D5500}" type="datetime1">
               <a:rPr lang="en-US" smtClean="0"/>
-              <a:t>4/17/2026</a:t>
+              <a:t>4/18/2026</a:t>
             </a:fld>
             <a:endParaRPr lang="en-US"/>
           </a:p>
@@ -3176,6 +3615,675 @@
 </p:sld>
 </file>
 
+<file path=ppt/slides/slide7.xml><?xml version="1.0" encoding="utf-8"?>
+<p:sld xmlns:a="http://schemas.openxmlformats.org/drawingml/2006/main" xmlns:r="http://schemas.openxmlformats.org/officeDocument/2006/relationships" xmlns:p="http://schemas.openxmlformats.org/presentationml/2006/main">
+  <p:cSld>
+    <p:bg>
+      <p:bgPr>
+        <a:solidFill>
+          <a:schemeClr val="bg1"/>
+        </a:solidFill>
+        <a:effectLst/>
+      </p:bgPr>
+    </p:bg>
+    <p:spTree>
+      <p:nvGrpSpPr>
+        <p:cNvPr id="1" name="">
+          <a:extLst>
+            <a:ext uri="{FF2B5EF4-FFF2-40B4-BE49-F238E27FC236}">
+              <a16:creationId xmlns:a16="http://schemas.microsoft.com/office/drawing/2014/main" id="{55A631CC-9497-D563-E854-9DCD75DAA7BD}"/>
+            </a:ext>
+          </a:extLst>
+        </p:cNvPr>
+        <p:cNvGrpSpPr/>
+        <p:nvPr/>
+      </p:nvGrpSpPr>
+      <p:grpSpPr>
+        <a:xfrm>
+          <a:off x="0" y="0"/>
+          <a:ext cx="0" cy="0"/>
+          <a:chOff x="0" y="0"/>
+          <a:chExt cx="0" cy="0"/>
+        </a:xfrm>
+      </p:grpSpPr>
+      <p:sp useBgFill="1">
+        <p:nvSpPr>
+          <p:cNvPr id="36" name="Rectangle 35">
+            <a:extLst>
+              <a:ext uri="{FF2B5EF4-FFF2-40B4-BE49-F238E27FC236}">
+                <a16:creationId xmlns:a16="http://schemas.microsoft.com/office/drawing/2014/main" id="{310135D4-D3A1-4556-B91B-4A12069D4231}"/>
+              </a:ext>
+              <a:ext uri="{C183D7F6-B498-43B3-948B-1728B52AA6E4}">
+                <adec:decorative xmlns:adec="http://schemas.microsoft.com/office/drawing/2017/decorative" val="1"/>
+              </a:ext>
+            </a:extLst>
+          </p:cNvPr>
+          <p:cNvSpPr>
+            <a:spLocks noGrp="1" noRot="1" noChangeAspect="1" noMove="1" noResize="1" noEditPoints="1" noAdjustHandles="1" noChangeArrowheads="1" noChangeShapeType="1" noTextEdit="1"/>
+          </p:cNvSpPr>
+          <p:nvPr>
+            <p:extLst>
+              <p:ext uri="{386F3935-93C4-4BCD-93E2-E3B085C9AB24}">
+                <p16:designElem xmlns:p16="http://schemas.microsoft.com/office/powerpoint/2015/main" val="1"/>
+              </p:ext>
+            </p:extLst>
+          </p:nvPr>
+        </p:nvSpPr>
+        <p:spPr>
+          <a:xfrm>
+            <a:off x="0" y="0"/>
+            <a:ext cx="12192000" cy="6858000"/>
+          </a:xfrm>
+          <a:prstGeom prst="rect">
+            <a:avLst/>
+          </a:prstGeom>
+          <a:ln w="12700" cap="flat" cmpd="sng" algn="ctr">
+            <a:noFill/>
+            <a:prstDash val="solid"/>
+            <a:miter lim="800000"/>
+          </a:ln>
+          <a:effectLst/>
+          <a:extLst>
+            <a:ext uri="{91240B29-F687-4F45-9708-019B960494DF}">
+              <a14:hiddenLine xmlns:a14="http://schemas.microsoft.com/office/drawing/2010/main" w="12700" cap="flat" cmpd="sng" algn="ctr">
+                <a:solidFill>
+                  <a:schemeClr val="accent1">
+                    <a:shade val="15000"/>
+                  </a:schemeClr>
+                </a:solidFill>
+                <a:prstDash val="solid"/>
+                <a:miter lim="800000"/>
+              </a14:hiddenLine>
+            </a:ext>
+          </a:extLst>
+        </p:spPr>
+        <p:style>
+          <a:lnRef idx="2">
+            <a:schemeClr val="accent1">
+              <a:shade val="15000"/>
+            </a:schemeClr>
+          </a:lnRef>
+          <a:fillRef idx="1">
+            <a:schemeClr val="accent1"/>
+          </a:fillRef>
+          <a:effectRef idx="0">
+            <a:schemeClr val="accent1"/>
+          </a:effectRef>
+          <a:fontRef idx="minor">
+            <a:schemeClr val="lt1"/>
+          </a:fontRef>
+        </p:style>
+        <p:txBody>
+          <a:bodyPr rtlCol="0" anchor="ctr"/>
+          <a:lstStyle/>
+          <a:p>
+            <a:pPr algn="ctr"/>
+            <a:endParaRPr lang="en-US"/>
+          </a:p>
+        </p:txBody>
+      </p:sp>
+      <p:pic>
+        <p:nvPicPr>
+          <p:cNvPr id="4" name="Picture 3">
+            <a:extLst>
+              <a:ext uri="{FF2B5EF4-FFF2-40B4-BE49-F238E27FC236}">
+                <a16:creationId xmlns:a16="http://schemas.microsoft.com/office/drawing/2014/main" id="{2FD3CBBB-2681-9E8B-9024-173E3E955506}"/>
+              </a:ext>
+            </a:extLst>
+          </p:cNvPr>
+          <p:cNvPicPr>
+            <a:picLocks noChangeAspect="1"/>
+          </p:cNvPicPr>
+          <p:nvPr/>
+        </p:nvPicPr>
+        <p:blipFill>
+          <a:blip r:embed="rId3"/>
+          <a:srcRect t="19403" r="9091" b="8320"/>
+          <a:stretch>
+            <a:fillRect/>
+          </a:stretch>
+        </p:blipFill>
+        <p:spPr>
+          <a:xfrm>
+            <a:off x="20" y="-1"/>
+            <a:ext cx="12191980" cy="6858001"/>
+          </a:xfrm>
+          <a:prstGeom prst="rect">
+            <a:avLst/>
+          </a:prstGeom>
+        </p:spPr>
+      </p:pic>
+      <p:sp>
+        <p:nvSpPr>
+          <p:cNvPr id="38" name="Rectangle 37">
+            <a:extLst>
+              <a:ext uri="{FF2B5EF4-FFF2-40B4-BE49-F238E27FC236}">
+                <a16:creationId xmlns:a16="http://schemas.microsoft.com/office/drawing/2014/main" id="{A9CCD9CD-49AE-3D3E-923B-81ECD3FBF75F}"/>
+              </a:ext>
+              <a:ext uri="{C183D7F6-B498-43B3-948B-1728B52AA6E4}">
+                <adec:decorative xmlns:adec="http://schemas.microsoft.com/office/drawing/2017/decorative" val="1"/>
+              </a:ext>
+            </a:extLst>
+          </p:cNvPr>
+          <p:cNvSpPr>
+            <a:spLocks noGrp="1" noRot="1" noChangeAspect="1" noMove="1" noResize="1" noEditPoints="1" noAdjustHandles="1" noChangeArrowheads="1" noChangeShapeType="1" noTextEdit="1"/>
+          </p:cNvSpPr>
+          <p:nvPr>
+            <p:extLst>
+              <p:ext uri="{386F3935-93C4-4BCD-93E2-E3B085C9AB24}">
+                <p16:designElem xmlns:p16="http://schemas.microsoft.com/office/powerpoint/2015/main" val="1"/>
+              </p:ext>
+            </p:extLst>
+          </p:nvPr>
+        </p:nvSpPr>
+        <p:spPr>
+          <a:xfrm rot="5400000">
+            <a:off x="752015" y="-752015"/>
+            <a:ext cx="6858000" cy="8362030"/>
+          </a:xfrm>
+          <a:prstGeom prst="rect">
+            <a:avLst/>
+          </a:prstGeom>
+          <a:gradFill>
+            <a:gsLst>
+              <a:gs pos="0">
+                <a:srgbClr val="000000">
+                  <a:alpha val="0"/>
+                </a:srgbClr>
+              </a:gs>
+              <a:gs pos="55000">
+                <a:srgbClr val="000000">
+                  <a:alpha val="50000"/>
+                </a:srgbClr>
+              </a:gs>
+              <a:gs pos="100000">
+                <a:srgbClr val="000000">
+                  <a:alpha val="60000"/>
+                </a:srgbClr>
+              </a:gs>
+            </a:gsLst>
+            <a:lin ang="5400000" scaled="1"/>
+          </a:gradFill>
+          <a:ln>
+            <a:noFill/>
+          </a:ln>
+        </p:spPr>
+        <p:style>
+          <a:lnRef idx="2">
+            <a:schemeClr val="accent1">
+              <a:shade val="50000"/>
+            </a:schemeClr>
+          </a:lnRef>
+          <a:fillRef idx="1">
+            <a:schemeClr val="accent1"/>
+          </a:fillRef>
+          <a:effectRef idx="0">
+            <a:schemeClr val="accent1"/>
+          </a:effectRef>
+          <a:fontRef idx="minor">
+            <a:schemeClr val="lt1"/>
+          </a:fontRef>
+        </p:style>
+        <p:txBody>
+          <a:bodyPr rtlCol="0" anchor="ctr"/>
+          <a:lstStyle/>
+          <a:p>
+            <a:pPr algn="ctr"/>
+            <a:endParaRPr lang="en-US"/>
+          </a:p>
+        </p:txBody>
+      </p:sp>
+      <p:sp>
+        <p:nvSpPr>
+          <p:cNvPr id="2" name="Titre 1">
+            <a:extLst>
+              <a:ext uri="{FF2B5EF4-FFF2-40B4-BE49-F238E27FC236}">
+                <a16:creationId xmlns:a16="http://schemas.microsoft.com/office/drawing/2014/main" id="{84395980-26B1-5D54-FA55-4D98C4802A72}"/>
+              </a:ext>
+            </a:extLst>
+          </p:cNvPr>
+          <p:cNvSpPr>
+            <a:spLocks noGrp="1"/>
+          </p:cNvSpPr>
+          <p:nvPr>
+            <p:ph type="ctrTitle"/>
+          </p:nvPr>
+        </p:nvSpPr>
+        <p:spPr>
+          <a:xfrm>
+            <a:off x="626918" y="3429000"/>
+            <a:ext cx="4506064" cy="1888742"/>
+          </a:xfrm>
+        </p:spPr>
+        <p:txBody>
+          <a:bodyPr>
+            <a:normAutofit/>
+          </a:bodyPr>
+          <a:lstStyle/>
+          <a:p>
+            <a:pPr algn="l"/>
+            <a:r>
+              <a:rPr lang="en-CA">
+                <a:solidFill>
+                  <a:srgbClr val="FFFFFF"/>
+                </a:solidFill>
+              </a:rPr>
+              <a:t>KNN</a:t>
+            </a:r>
+          </a:p>
+        </p:txBody>
+      </p:sp>
+      <p:sp>
+        <p:nvSpPr>
+          <p:cNvPr id="3" name="Sous-titre 2">
+            <a:extLst>
+              <a:ext uri="{FF2B5EF4-FFF2-40B4-BE49-F238E27FC236}">
+                <a16:creationId xmlns:a16="http://schemas.microsoft.com/office/drawing/2014/main" id="{D4EB4C6C-9943-6CFE-E5A3-D878FC947440}"/>
+              </a:ext>
+            </a:extLst>
+          </p:cNvPr>
+          <p:cNvSpPr>
+            <a:spLocks noGrp="1"/>
+          </p:cNvSpPr>
+          <p:nvPr>
+            <p:ph type="subTitle" idx="1"/>
+          </p:nvPr>
+        </p:nvSpPr>
+        <p:spPr>
+          <a:xfrm>
+            <a:off x="626916" y="5428229"/>
+            <a:ext cx="4506066" cy="899643"/>
+          </a:xfrm>
+        </p:spPr>
+        <p:txBody>
+          <a:bodyPr>
+            <a:normAutofit/>
+          </a:bodyPr>
+          <a:lstStyle/>
+          <a:p>
+            <a:pPr algn="l"/>
+            <a:r>
+              <a:rPr lang="en-CA" dirty="0">
+                <a:solidFill>
+                  <a:srgbClr val="FFFFFF"/>
+                </a:solidFill>
+              </a:rPr>
+              <a:t>API, </a:t>
+            </a:r>
+            <a:r>
+              <a:rPr lang="en-CA" dirty="0" err="1">
+                <a:solidFill>
+                  <a:srgbClr val="FFFFFF"/>
+                </a:solidFill>
+              </a:rPr>
+              <a:t>méthdologie</a:t>
+            </a:r>
+            <a:r>
+              <a:rPr lang="en-CA" dirty="0">
+                <a:solidFill>
+                  <a:srgbClr val="FFFFFF"/>
+                </a:solidFill>
+              </a:rPr>
+              <a:t> et </a:t>
+            </a:r>
+            <a:r>
+              <a:rPr lang="en-CA" dirty="0" err="1">
+                <a:solidFill>
+                  <a:srgbClr val="FFFFFF"/>
+                </a:solidFill>
+              </a:rPr>
+              <a:t>résultats</a:t>
+            </a:r>
+            <a:endParaRPr lang="en-CA" dirty="0">
+              <a:solidFill>
+                <a:srgbClr val="FFFFFF"/>
+              </a:solidFill>
+            </a:endParaRPr>
+          </a:p>
+        </p:txBody>
+      </p:sp>
+      <p:pic>
+        <p:nvPicPr>
+          <p:cNvPr id="8" name="Image 7">
+            <a:extLst>
+              <a:ext uri="{FF2B5EF4-FFF2-40B4-BE49-F238E27FC236}">
+                <a16:creationId xmlns:a16="http://schemas.microsoft.com/office/drawing/2014/main" id="{89BEFE6C-F8FF-FA1C-B2BA-834D9FD01DF8}"/>
+              </a:ext>
+            </a:extLst>
+          </p:cNvPr>
+          <p:cNvPicPr>
+            <a:picLocks noChangeAspect="1"/>
+          </p:cNvPicPr>
+          <p:nvPr/>
+        </p:nvPicPr>
+        <p:blipFill>
+          <a:blip r:embed="rId4"/>
+          <a:stretch>
+            <a:fillRect/>
+          </a:stretch>
+        </p:blipFill>
+        <p:spPr>
+          <a:xfrm>
+            <a:off x="8252971" y="4295759"/>
+            <a:ext cx="3939009" cy="2562241"/>
+          </a:xfrm>
+          <a:prstGeom prst="rect">
+            <a:avLst/>
+          </a:prstGeom>
+        </p:spPr>
+      </p:pic>
+      <p:pic>
+        <p:nvPicPr>
+          <p:cNvPr id="10" name="Image 9">
+            <a:extLst>
+              <a:ext uri="{FF2B5EF4-FFF2-40B4-BE49-F238E27FC236}">
+                <a16:creationId xmlns:a16="http://schemas.microsoft.com/office/drawing/2014/main" id="{8E681934-E54A-C628-9001-FBE0E0975948}"/>
+              </a:ext>
+            </a:extLst>
+          </p:cNvPr>
+          <p:cNvPicPr>
+            <a:picLocks noChangeAspect="1"/>
+          </p:cNvPicPr>
+          <p:nvPr/>
+        </p:nvPicPr>
+        <p:blipFill>
+          <a:blip r:embed="rId5"/>
+          <a:stretch>
+            <a:fillRect/>
+          </a:stretch>
+        </p:blipFill>
+        <p:spPr>
+          <a:xfrm>
+            <a:off x="8988906" y="-2"/>
+            <a:ext cx="3203074" cy="4295761"/>
+          </a:xfrm>
+          <a:prstGeom prst="rect">
+            <a:avLst/>
+          </a:prstGeom>
+        </p:spPr>
+      </p:pic>
+      <p:pic>
+        <p:nvPicPr>
+          <p:cNvPr id="12" name="Image 11">
+            <a:extLst>
+              <a:ext uri="{FF2B5EF4-FFF2-40B4-BE49-F238E27FC236}">
+                <a16:creationId xmlns:a16="http://schemas.microsoft.com/office/drawing/2014/main" id="{BD5685C5-4370-ABD0-1799-1A22B27EF3C4}"/>
+              </a:ext>
+            </a:extLst>
+          </p:cNvPr>
+          <p:cNvPicPr>
+            <a:picLocks noChangeAspect="1"/>
+          </p:cNvPicPr>
+          <p:nvPr/>
+        </p:nvPicPr>
+        <p:blipFill>
+          <a:blip r:embed="rId6"/>
+          <a:stretch>
+            <a:fillRect/>
+          </a:stretch>
+        </p:blipFill>
+        <p:spPr>
+          <a:xfrm>
+            <a:off x="3571875" y="-2"/>
+            <a:ext cx="5417011" cy="4295761"/>
+          </a:xfrm>
+          <a:prstGeom prst="rect">
+            <a:avLst/>
+          </a:prstGeom>
+        </p:spPr>
+      </p:pic>
+    </p:spTree>
+    <p:extLst>
+      <p:ext uri="{BB962C8B-B14F-4D97-AF65-F5344CB8AC3E}">
+        <p14:creationId xmlns:p14="http://schemas.microsoft.com/office/powerpoint/2010/main" val="4146219361"/>
+      </p:ext>
+    </p:extLst>
+  </p:cSld>
+  <p:clrMapOvr>
+    <a:overrideClrMapping bg1="dk1" tx1="lt1" bg2="dk2" tx2="lt2" accent1="accent1" accent2="accent2" accent3="accent3" accent4="accent4" accent5="accent5" accent6="accent6" hlink="hlink" folHlink="folHlink"/>
+  </p:clrMapOvr>
+</p:sld>
+</file>
+
+<file path=ppt/slides/slide8.xml><?xml version="1.0" encoding="utf-8"?>
+<p:sld xmlns:a="http://schemas.openxmlformats.org/drawingml/2006/main" xmlns:r="http://schemas.openxmlformats.org/officeDocument/2006/relationships" xmlns:p="http://schemas.openxmlformats.org/presentationml/2006/main">
+  <p:cSld>
+    <p:bg>
+      <p:bgPr>
+        <a:solidFill>
+          <a:schemeClr val="bg1"/>
+        </a:solidFill>
+        <a:effectLst/>
+      </p:bgPr>
+    </p:bg>
+    <p:spTree>
+      <p:nvGrpSpPr>
+        <p:cNvPr id="1" name="">
+          <a:extLst>
+            <a:ext uri="{FF2B5EF4-FFF2-40B4-BE49-F238E27FC236}">
+              <a16:creationId xmlns:a16="http://schemas.microsoft.com/office/drawing/2014/main" id="{CA300B50-8E0E-A958-D9C9-15DA69E2E1F6}"/>
+            </a:ext>
+          </a:extLst>
+        </p:cNvPr>
+        <p:cNvGrpSpPr/>
+        <p:nvPr/>
+      </p:nvGrpSpPr>
+      <p:grpSpPr>
+        <a:xfrm>
+          <a:off x="0" y="0"/>
+          <a:ext cx="0" cy="0"/>
+          <a:chOff x="0" y="0"/>
+          <a:chExt cx="0" cy="0"/>
+        </a:xfrm>
+      </p:grpSpPr>
+      <p:sp useBgFill="1">
+        <p:nvSpPr>
+          <p:cNvPr id="31" name="Rectangle 30">
+            <a:extLst>
+              <a:ext uri="{FF2B5EF4-FFF2-40B4-BE49-F238E27FC236}">
+                <a16:creationId xmlns:a16="http://schemas.microsoft.com/office/drawing/2014/main" id="{D3591AD5-6331-0A2A-FE07-373766B0D436}"/>
+              </a:ext>
+              <a:ext uri="{C183D7F6-B498-43B3-948B-1728B52AA6E4}">
+                <adec:decorative xmlns:adec="http://schemas.microsoft.com/office/drawing/2017/decorative" val="1"/>
+              </a:ext>
+            </a:extLst>
+          </p:cNvPr>
+          <p:cNvSpPr>
+            <a:spLocks noGrp="1" noRot="1" noChangeAspect="1" noMove="1" noResize="1" noEditPoints="1" noAdjustHandles="1" noChangeArrowheads="1" noChangeShapeType="1" noTextEdit="1"/>
+          </p:cNvSpPr>
+          <p:nvPr>
+            <p:extLst>
+              <p:ext uri="{386F3935-93C4-4BCD-93E2-E3B085C9AB24}">
+                <p16:designElem xmlns:p16="http://schemas.microsoft.com/office/powerpoint/2015/main" val="1"/>
+              </p:ext>
+            </p:extLst>
+          </p:nvPr>
+        </p:nvSpPr>
+        <p:spPr>
+          <a:xfrm>
+            <a:off x="0" y="0"/>
+            <a:ext cx="12192000" cy="6858000"/>
+          </a:xfrm>
+          <a:prstGeom prst="rect">
+            <a:avLst/>
+          </a:prstGeom>
+          <a:ln w="12700" cap="flat" cmpd="sng" algn="ctr">
+            <a:noFill/>
+            <a:prstDash val="solid"/>
+            <a:miter lim="800000"/>
+          </a:ln>
+          <a:effectLst/>
+          <a:extLst>
+            <a:ext uri="{91240B29-F687-4F45-9708-019B960494DF}">
+              <a14:hiddenLine xmlns:a14="http://schemas.microsoft.com/office/drawing/2010/main" w="12700" cap="flat" cmpd="sng" algn="ctr">
+                <a:solidFill>
+                  <a:schemeClr val="accent1">
+                    <a:shade val="15000"/>
+                  </a:schemeClr>
+                </a:solidFill>
+                <a:prstDash val="solid"/>
+                <a:miter lim="800000"/>
+              </a14:hiddenLine>
+            </a:ext>
+          </a:extLst>
+        </p:spPr>
+        <p:style>
+          <a:lnRef idx="2">
+            <a:schemeClr val="accent1">
+              <a:shade val="15000"/>
+            </a:schemeClr>
+          </a:lnRef>
+          <a:fillRef idx="1">
+            <a:schemeClr val="accent1"/>
+          </a:fillRef>
+          <a:effectRef idx="0">
+            <a:schemeClr val="accent1"/>
+          </a:effectRef>
+          <a:fontRef idx="minor">
+            <a:schemeClr val="lt1"/>
+          </a:fontRef>
+        </p:style>
+        <p:txBody>
+          <a:bodyPr rtlCol="0" anchor="ctr"/>
+          <a:lstStyle/>
+          <a:p>
+            <a:pPr algn="ctr"/>
+            <a:endParaRPr lang="en-US"/>
+          </a:p>
+        </p:txBody>
+      </p:sp>
+      <p:pic>
+        <p:nvPicPr>
+          <p:cNvPr id="4" name="Picture 3">
+            <a:extLst>
+              <a:ext uri="{FF2B5EF4-FFF2-40B4-BE49-F238E27FC236}">
+                <a16:creationId xmlns:a16="http://schemas.microsoft.com/office/drawing/2014/main" id="{42E3CC76-2A4D-66D3-EAA5-1FF1A8A3C523}"/>
+              </a:ext>
+            </a:extLst>
+          </p:cNvPr>
+          <p:cNvPicPr>
+            <a:picLocks noChangeAspect="1"/>
+          </p:cNvPicPr>
+          <p:nvPr/>
+        </p:nvPicPr>
+        <p:blipFill>
+          <a:blip r:embed="rId2">
+            <a:alphaModFix amt="60000"/>
+          </a:blip>
+          <a:srcRect t="14243" b="6252"/>
+          <a:stretch>
+            <a:fillRect/>
+          </a:stretch>
+        </p:blipFill>
+        <p:spPr>
+          <a:xfrm>
+            <a:off x="1" y="1"/>
+            <a:ext cx="12192000" cy="6857999"/>
+          </a:xfrm>
+          <a:prstGeom prst="rect">
+            <a:avLst/>
+          </a:prstGeom>
+        </p:spPr>
+      </p:pic>
+      <p:sp>
+        <p:nvSpPr>
+          <p:cNvPr id="2" name="Titre 1">
+            <a:extLst>
+              <a:ext uri="{FF2B5EF4-FFF2-40B4-BE49-F238E27FC236}">
+                <a16:creationId xmlns:a16="http://schemas.microsoft.com/office/drawing/2014/main" id="{D8890DB0-91A0-C0A4-4600-0B2BAD1A8A37}"/>
+              </a:ext>
+            </a:extLst>
+          </p:cNvPr>
+          <p:cNvSpPr>
+            <a:spLocks noGrp="1"/>
+          </p:cNvSpPr>
+          <p:nvPr>
+            <p:ph type="ctrTitle"/>
+          </p:nvPr>
+        </p:nvSpPr>
+        <p:spPr>
+          <a:xfrm>
+            <a:off x="2301923" y="1482602"/>
+            <a:ext cx="7588155" cy="2236264"/>
+          </a:xfrm>
+        </p:spPr>
+        <p:txBody>
+          <a:bodyPr>
+            <a:normAutofit/>
+          </a:bodyPr>
+          <a:lstStyle/>
+          <a:p>
+            <a:r>
+              <a:rPr lang="en-CA" sz="5400" dirty="0" err="1">
+                <a:solidFill>
+                  <a:srgbClr val="FFFFFF"/>
+                </a:solidFill>
+              </a:rPr>
+              <a:t>Création</a:t>
+            </a:r>
+            <a:r>
+              <a:rPr lang="en-CA" sz="5400" dirty="0">
+                <a:solidFill>
+                  <a:srgbClr val="FFFFFF"/>
+                </a:solidFill>
+              </a:rPr>
+              <a:t> d’un nouveau user</a:t>
+            </a:r>
+          </a:p>
+        </p:txBody>
+      </p:sp>
+      <p:sp>
+        <p:nvSpPr>
+          <p:cNvPr id="3" name="Sous-titre 2">
+            <a:extLst>
+              <a:ext uri="{FF2B5EF4-FFF2-40B4-BE49-F238E27FC236}">
+                <a16:creationId xmlns:a16="http://schemas.microsoft.com/office/drawing/2014/main" id="{3E52563C-EB6E-F0E3-59FE-295E14BAD965}"/>
+              </a:ext>
+            </a:extLst>
+          </p:cNvPr>
+          <p:cNvSpPr>
+            <a:spLocks noGrp="1"/>
+          </p:cNvSpPr>
+          <p:nvPr>
+            <p:ph type="subTitle" idx="1"/>
+          </p:nvPr>
+        </p:nvSpPr>
+        <p:spPr>
+          <a:xfrm>
+            <a:off x="2301923" y="3793937"/>
+            <a:ext cx="7588155" cy="1414091"/>
+          </a:xfrm>
+        </p:spPr>
+        <p:txBody>
+          <a:bodyPr>
+            <a:normAutofit/>
+          </a:bodyPr>
+          <a:lstStyle/>
+          <a:p>
+            <a:r>
+              <a:rPr lang="en-CA" sz="2200" dirty="0">
+                <a:solidFill>
+                  <a:srgbClr val="FFFFFF"/>
+                </a:solidFill>
+              </a:rPr>
+              <a:t>https://dashboard.render.com/web/srv-d7ekrcbeo5us73fir0gg</a:t>
+            </a:r>
+          </a:p>
+        </p:txBody>
+      </p:sp>
+    </p:spTree>
+    <p:extLst>
+      <p:ext uri="{BB962C8B-B14F-4D97-AF65-F5344CB8AC3E}">
+        <p14:creationId xmlns:p14="http://schemas.microsoft.com/office/powerpoint/2010/main" val="4167171509"/>
+      </p:ext>
+    </p:extLst>
+  </p:cSld>
+  <p:clrMapOvr>
+    <a:overrideClrMapping bg1="dk1" tx1="lt1" bg2="dk2" tx2="lt2" accent1="accent1" accent2="accent2" accent3="accent3" accent4="accent4" accent5="accent5" accent6="accent6" hlink="hlink" folHlink="folHlink"/>
+  </p:clrMapOvr>
+</p:sld>
+</file>
+
 <file path=ppt/theme/theme1.xml><?xml version="1.0" encoding="utf-8"?>
 <a:theme xmlns:a="http://schemas.openxmlformats.org/drawingml/2006/main" name="VanillaVTI">
   <a:themeElements>
@@ -3377,6 +4485,321 @@
 </a:theme>
 </file>
 
+<file path=ppt/theme/theme2.xml><?xml version="1.0" encoding="utf-8"?>
+<a:theme xmlns:a="http://schemas.openxmlformats.org/drawingml/2006/main" name="Thème Office">
+  <a:themeElements>
+    <a:clrScheme name="Office">
+      <a:dk1>
+        <a:sysClr val="windowText" lastClr="000000"/>
+      </a:dk1>
+      <a:lt1>
+        <a:sysClr val="window" lastClr="FFFFFF"/>
+      </a:lt1>
+      <a:dk2>
+        <a:srgbClr val="0E2841"/>
+      </a:dk2>
+      <a:lt2>
+        <a:srgbClr val="E8E8E8"/>
+      </a:lt2>
+      <a:accent1>
+        <a:srgbClr val="156082"/>
+      </a:accent1>
+      <a:accent2>
+        <a:srgbClr val="E97132"/>
+      </a:accent2>
+      <a:accent3>
+        <a:srgbClr val="196B24"/>
+      </a:accent3>
+      <a:accent4>
+        <a:srgbClr val="0F9ED5"/>
+      </a:accent4>
+      <a:accent5>
+        <a:srgbClr val="A02B93"/>
+      </a:accent5>
+      <a:accent6>
+        <a:srgbClr val="4EA72E"/>
+      </a:accent6>
+      <a:hlink>
+        <a:srgbClr val="467886"/>
+      </a:hlink>
+      <a:folHlink>
+        <a:srgbClr val="96607D"/>
+      </a:folHlink>
+    </a:clrScheme>
+    <a:fontScheme name="Office">
+      <a:majorFont>
+        <a:latin typeface="Aptos Display" panose="02110004020202020204"/>
+        <a:ea typeface=""/>
+        <a:cs typeface=""/>
+        <a:font script="Jpan" typeface="游ゴシック Light"/>
+        <a:font script="Hang" typeface="맑은 고딕"/>
+        <a:font script="Hans" typeface="等线 Light"/>
+        <a:font script="Hant" typeface="新細明體"/>
+        <a:font script="Arab" typeface="Times New Roman"/>
+        <a:font script="Hebr" typeface="Times New Roman"/>
+        <a:font script="Thai" typeface="Angsana New"/>
+        <a:font script="Ethi" typeface="Nyala"/>
+        <a:font script="Beng" typeface="Vrinda"/>
+        <a:font script="Gujr" typeface="Shruti"/>
+        <a:font script="Khmr" typeface="MoolBoran"/>
+        <a:font script="Knda" typeface="Tunga"/>
+        <a:font script="Guru" typeface="Raavi"/>
+        <a:font script="Cans" typeface="Euphemia"/>
+        <a:font script="Cher" typeface="Plantagenet Cherokee"/>
+        <a:font script="Yiii" typeface="Microsoft Yi Baiti"/>
+        <a:font script="Tibt" typeface="Microsoft Himalaya"/>
+        <a:font script="Thaa" typeface="MV Boli"/>
+        <a:font script="Deva" typeface="Mangal"/>
+        <a:font script="Telu" typeface="Gautami"/>
+        <a:font script="Taml" typeface="Latha"/>
+        <a:font script="Syrc" typeface="Estrangelo Edessa"/>
+        <a:font script="Orya" typeface="Kalinga"/>
+        <a:font script="Mlym" typeface="Kartika"/>
+        <a:font script="Laoo" typeface="DokChampa"/>
+        <a:font script="Sinh" typeface="Iskoola Pota"/>
+        <a:font script="Mong" typeface="Mongolian Baiti"/>
+        <a:font script="Viet" typeface="Times New Roman"/>
+        <a:font script="Uigh" typeface="Microsoft Uighur"/>
+        <a:font script="Geor" typeface="Sylfaen"/>
+        <a:font script="Armn" typeface="Arial"/>
+        <a:font script="Bugi" typeface="Leelawadee UI"/>
+        <a:font script="Bopo" typeface="Microsoft JhengHei"/>
+        <a:font script="Java" typeface="Javanese Text"/>
+        <a:font script="Lisu" typeface="Segoe UI"/>
+        <a:font script="Mymr" typeface="Myanmar Text"/>
+        <a:font script="Nkoo" typeface="Ebrima"/>
+        <a:font script="Olck" typeface="Nirmala UI"/>
+        <a:font script="Osma" typeface="Ebrima"/>
+        <a:font script="Phag" typeface="Phagspa"/>
+        <a:font script="Syrn" typeface="Estrangelo Edessa"/>
+        <a:font script="Syrj" typeface="Estrangelo Edessa"/>
+        <a:font script="Syre" typeface="Estrangelo Edessa"/>
+        <a:font script="Sora" typeface="Nirmala UI"/>
+        <a:font script="Tale" typeface="Microsoft Tai Le"/>
+        <a:font script="Talu" typeface="Microsoft New Tai Lue"/>
+        <a:font script="Tfng" typeface="Ebrima"/>
+      </a:majorFont>
+      <a:minorFont>
+        <a:latin typeface="Aptos" panose="02110004020202020204"/>
+        <a:ea typeface=""/>
+        <a:cs typeface=""/>
+        <a:font script="Jpan" typeface="游ゴシック"/>
+        <a:font script="Hang" typeface="맑은 고딕"/>
+        <a:font script="Hans" typeface="等线"/>
+        <a:font script="Hant" typeface="新細明體"/>
+        <a:font script="Arab" typeface="Arial"/>
+        <a:font script="Hebr" typeface="Arial"/>
+        <a:font script="Thai" typeface="Cordia New"/>
+        <a:font script="Ethi" typeface="Nyala"/>
+        <a:font script="Beng" typeface="Vrinda"/>
+        <a:font script="Gujr" typeface="Shruti"/>
+        <a:font script="Khmr" typeface="DaunPenh"/>
+        <a:font script="Knda" typeface="Tunga"/>
+        <a:font script="Guru" typeface="Raavi"/>
+        <a:font script="Cans" typeface="Euphemia"/>
+        <a:font script="Cher" typeface="Plantagenet Cherokee"/>
+        <a:font script="Yiii" typeface="Microsoft Yi Baiti"/>
+        <a:font script="Tibt" typeface="Microsoft Himalaya"/>
+        <a:font script="Thaa" typeface="MV Boli"/>
+        <a:font script="Deva" typeface="Mangal"/>
+        <a:font script="Telu" typeface="Gautami"/>
+        <a:font script="Taml" typeface="Latha"/>
+        <a:font script="Syrc" typeface="Estrangelo Edessa"/>
+        <a:font script="Orya" typeface="Kalinga"/>
+        <a:font script="Mlym" typeface="Kartika"/>
+        <a:font script="Laoo" typeface="DokChampa"/>
+        <a:font script="Sinh" typeface="Iskoola Pota"/>
+        <a:font script="Mong" typeface="Mongolian Baiti"/>
+        <a:font script="Viet" typeface="Arial"/>
+        <a:font script="Uigh" typeface="Microsoft Uighur"/>
+        <a:font script="Geor" typeface="Sylfaen"/>
+        <a:font script="Armn" typeface="Arial"/>
+        <a:font script="Bugi" typeface="Leelawadee UI"/>
+        <a:font script="Bopo" typeface="Microsoft JhengHei"/>
+        <a:font script="Java" typeface="Javanese Text"/>
+        <a:font script="Lisu" typeface="Segoe UI"/>
+        <a:font script="Mymr" typeface="Myanmar Text"/>
+        <a:font script="Nkoo" typeface="Ebrima"/>
+        <a:font script="Olck" typeface="Nirmala UI"/>
+        <a:font script="Osma" typeface="Ebrima"/>
+        <a:font script="Phag" typeface="Phagspa"/>
+        <a:font script="Syrn" typeface="Estrangelo Edessa"/>
+        <a:font script="Syrj" typeface="Estrangelo Edessa"/>
+        <a:font script="Syre" typeface="Estrangelo Edessa"/>
+        <a:font script="Sora" typeface="Nirmala UI"/>
+        <a:font script="Tale" typeface="Microsoft Tai Le"/>
+        <a:font script="Talu" typeface="Microsoft New Tai Lue"/>
+        <a:font script="Tfng" typeface="Ebrima"/>
+      </a:minorFont>
+    </a:fontScheme>
+    <a:fmtScheme name="Office">
+      <a:fillStyleLst>
+        <a:solidFill>
+          <a:schemeClr val="phClr"/>
+        </a:solidFill>
+        <a:gradFill rotWithShape="1">
+          <a:gsLst>
+            <a:gs pos="0">
+              <a:schemeClr val="phClr">
+                <a:lumMod val="110000"/>
+                <a:satMod val="105000"/>
+                <a:tint val="67000"/>
+              </a:schemeClr>
+            </a:gs>
+            <a:gs pos="50000">
+              <a:schemeClr val="phClr">
+                <a:lumMod val="105000"/>
+                <a:satMod val="103000"/>
+                <a:tint val="73000"/>
+              </a:schemeClr>
+            </a:gs>
+            <a:gs pos="100000">
+              <a:schemeClr val="phClr">
+                <a:lumMod val="105000"/>
+                <a:satMod val="109000"/>
+                <a:tint val="81000"/>
+              </a:schemeClr>
+            </a:gs>
+          </a:gsLst>
+          <a:lin ang="5400000" scaled="0"/>
+        </a:gradFill>
+        <a:gradFill rotWithShape="1">
+          <a:gsLst>
+            <a:gs pos="0">
+              <a:schemeClr val="phClr">
+                <a:satMod val="103000"/>
+                <a:lumMod val="102000"/>
+                <a:tint val="94000"/>
+              </a:schemeClr>
+            </a:gs>
+            <a:gs pos="50000">
+              <a:schemeClr val="phClr">
+                <a:satMod val="110000"/>
+                <a:lumMod val="100000"/>
+                <a:shade val="100000"/>
+              </a:schemeClr>
+            </a:gs>
+            <a:gs pos="100000">
+              <a:schemeClr val="phClr">
+                <a:lumMod val="99000"/>
+                <a:satMod val="120000"/>
+                <a:shade val="78000"/>
+              </a:schemeClr>
+            </a:gs>
+          </a:gsLst>
+          <a:lin ang="5400000" scaled="0"/>
+        </a:gradFill>
+      </a:fillStyleLst>
+      <a:lnStyleLst>
+        <a:ln w="12700" cap="flat" cmpd="sng" algn="ctr">
+          <a:solidFill>
+            <a:schemeClr val="phClr"/>
+          </a:solidFill>
+          <a:prstDash val="solid"/>
+          <a:miter lim="800000"/>
+        </a:ln>
+        <a:ln w="19050" cap="flat" cmpd="sng" algn="ctr">
+          <a:solidFill>
+            <a:schemeClr val="phClr"/>
+          </a:solidFill>
+          <a:prstDash val="solid"/>
+          <a:miter lim="800000"/>
+        </a:ln>
+        <a:ln w="25400" cap="flat" cmpd="sng" algn="ctr">
+          <a:solidFill>
+            <a:schemeClr val="phClr"/>
+          </a:solidFill>
+          <a:prstDash val="solid"/>
+          <a:miter lim="800000"/>
+        </a:ln>
+      </a:lnStyleLst>
+      <a:effectStyleLst>
+        <a:effectStyle>
+          <a:effectLst/>
+        </a:effectStyle>
+        <a:effectStyle>
+          <a:effectLst/>
+        </a:effectStyle>
+        <a:effectStyle>
+          <a:effectLst>
+            <a:outerShdw blurRad="57150" dist="19050" dir="5400000" algn="ctr" rotWithShape="0">
+              <a:srgbClr val="000000">
+                <a:alpha val="63000"/>
+              </a:srgbClr>
+            </a:outerShdw>
+          </a:effectLst>
+        </a:effectStyle>
+      </a:effectStyleLst>
+      <a:bgFillStyleLst>
+        <a:solidFill>
+          <a:schemeClr val="phClr"/>
+        </a:solidFill>
+        <a:solidFill>
+          <a:schemeClr val="phClr">
+            <a:tint val="95000"/>
+            <a:satMod val="170000"/>
+          </a:schemeClr>
+        </a:solidFill>
+        <a:gradFill rotWithShape="1">
+          <a:gsLst>
+            <a:gs pos="0">
+              <a:schemeClr val="phClr">
+                <a:tint val="93000"/>
+                <a:satMod val="150000"/>
+                <a:shade val="98000"/>
+                <a:lumMod val="102000"/>
+              </a:schemeClr>
+            </a:gs>
+            <a:gs pos="50000">
+              <a:schemeClr val="phClr">
+                <a:tint val="98000"/>
+                <a:satMod val="130000"/>
+                <a:shade val="90000"/>
+                <a:lumMod val="103000"/>
+              </a:schemeClr>
+            </a:gs>
+            <a:gs pos="100000">
+              <a:schemeClr val="phClr">
+                <a:shade val="63000"/>
+                <a:satMod val="120000"/>
+              </a:schemeClr>
+            </a:gs>
+          </a:gsLst>
+          <a:lin ang="5400000" scaled="0"/>
+        </a:gradFill>
+      </a:bgFillStyleLst>
+    </a:fmtScheme>
+  </a:themeElements>
+  <a:objectDefaults>
+    <a:lnDef>
+      <a:spPr/>
+      <a:bodyPr/>
+      <a:lstStyle/>
+      <a:style>
+        <a:lnRef idx="2">
+          <a:schemeClr val="accent1"/>
+        </a:lnRef>
+        <a:fillRef idx="0">
+          <a:schemeClr val="accent1"/>
+        </a:fillRef>
+        <a:effectRef idx="1">
+          <a:schemeClr val="accent1"/>
+        </a:effectRef>
+        <a:fontRef idx="minor">
+          <a:schemeClr val="tx1"/>
+        </a:fontRef>
+      </a:style>
+    </a:lnDef>
+  </a:objectDefaults>
+  <a:extraClrSchemeLst/>
+  <a:extLst>
+    <a:ext uri="{05A4C25C-085E-4340-85A3-A5531E510DB2}">
+      <thm15:themeFamily xmlns:thm15="http://schemas.microsoft.com/office/thememl/2012/main" name="Office Theme" id="{2E142A2C-CD16-42D6-873A-C26D2A0506FA}" vid="{1BDDFF52-6CD6-40A5-AB3C-68EB2F1E4D0A}"/>
+    </a:ext>
+  </a:extLst>
+</a:theme>
+</file>
+
 <file path=docMetadata/LabelInfo.xml><?xml version="1.0" encoding="utf-8"?>
 <clbl:labelList xmlns:clbl="http://schemas.microsoft.com/office/2020/mipLabelMetadata">
   <clbl:label id="{3513b79f-ce8d-43d6-b7e5-c12d3e236916}" enabled="1" method="Standard" siteId="{ad8a84ef-f1f3-4b14-ad08-b99ca66f7e30}" contentBits="0" removed="0"/>

--- a/RecFilmsUA3.pptx
+++ b/RecFilmsUA3.pptx
@@ -257,7 +257,7 @@
           <a:p>
             <a:fld id="{A92E5350-3EDC-40D8-A7EE-3A904327B402}" type="datetimeFigureOut">
               <a:rPr lang="en-CA" smtClean="0"/>
-              <a:t>2026-04-18</a:t>
+              <a:t>2026-04-19</a:t>
             </a:fld>
             <a:endParaRPr lang="en-CA"/>
           </a:p>
@@ -760,7 +760,7 @@
           <a:p>
             <a:fld id="{C128FA71-3A18-48C0-980F-4B68F7F63042}" type="datetime1">
               <a:rPr lang="en-US" smtClean="0"/>
-              <a:t>4/18/2026</a:t>
+              <a:t>4/19/2026</a:t>
             </a:fld>
             <a:endParaRPr lang="en-US"/>
           </a:p>
@@ -999,7 +999,7 @@
           <a:p>
             <a:fld id="{67F45AC6-C491-4585-A584-9CE2AF7D5500}" type="datetime1">
               <a:rPr lang="en-US" smtClean="0"/>
-              <a:t>4/18/2026</a:t>
+              <a:t>4/19/2026</a:t>
             </a:fld>
             <a:endParaRPr lang="en-US"/>
           </a:p>
@@ -2230,10 +2230,10 @@
       </p:grpSpPr>
       <p:sp useBgFill="1">
         <p:nvSpPr>
-          <p:cNvPr id="31" name="Rectangle 30">
-            <a:extLst>
-              <a:ext uri="{FF2B5EF4-FFF2-40B4-BE49-F238E27FC236}">
-                <a16:creationId xmlns:a16="http://schemas.microsoft.com/office/drawing/2014/main" id="{2A54C444-C9D4-8C66-791E-B09D442031DF}"/>
+          <p:cNvPr id="36" name="Rectangle 35">
+            <a:extLst>
+              <a:ext uri="{FF2B5EF4-FFF2-40B4-BE49-F238E27FC236}">
+                <a16:creationId xmlns:a16="http://schemas.microsoft.com/office/drawing/2014/main" id="{ED587E41-605C-A8E4-8BA5-0E0B3797C9AA}"/>
               </a:ext>
               <a:ext uri="{C183D7F6-B498-43B3-948B-1728B52AA6E4}">
                 <adec:decorative xmlns:adec="http://schemas.microsoft.com/office/drawing/2017/decorative" val="1"/>
@@ -2319,24 +2319,87 @@
           <p:nvPr/>
         </p:nvPicPr>
         <p:blipFill>
-          <a:blip r:embed="rId2">
-            <a:alphaModFix amt="60000"/>
-          </a:blip>
-          <a:srcRect t="14243" b="6252"/>
+          <a:blip r:embed="rId2"/>
+          <a:srcRect l="9091" t="27722"/>
           <a:stretch>
             <a:fillRect/>
           </a:stretch>
         </p:blipFill>
         <p:spPr>
           <a:xfrm>
-            <a:off x="1" y="1"/>
-            <a:ext cx="12192000" cy="6857999"/>
+            <a:off x="20" y="10"/>
+            <a:ext cx="12191980" cy="6857990"/>
           </a:xfrm>
           <a:prstGeom prst="rect">
             <a:avLst/>
           </a:prstGeom>
         </p:spPr>
       </p:pic>
+      <p:sp>
+        <p:nvSpPr>
+          <p:cNvPr id="38" name="Rectangle 37">
+            <a:extLst>
+              <a:ext uri="{FF2B5EF4-FFF2-40B4-BE49-F238E27FC236}">
+                <a16:creationId xmlns:a16="http://schemas.microsoft.com/office/drawing/2014/main" id="{EBD48A03-0DF9-3063-CB15-1BC2AEC79F1C}"/>
+              </a:ext>
+              <a:ext uri="{C183D7F6-B498-43B3-948B-1728B52AA6E4}">
+                <adec:decorative xmlns:adec="http://schemas.microsoft.com/office/drawing/2017/decorative" val="1"/>
+              </a:ext>
+            </a:extLst>
+          </p:cNvPr>
+          <p:cNvSpPr>
+            <a:spLocks noGrp="1" noRot="1" noChangeAspect="1" noMove="1" noResize="1" noEditPoints="1" noAdjustHandles="1" noChangeArrowheads="1" noChangeShapeType="1" noTextEdit="1"/>
+          </p:cNvSpPr>
+          <p:nvPr>
+            <p:extLst>
+              <p:ext uri="{386F3935-93C4-4BCD-93E2-E3B085C9AB24}">
+                <p16:designElem xmlns:p16="http://schemas.microsoft.com/office/powerpoint/2015/main" val="1"/>
+              </p:ext>
+            </p:extLst>
+          </p:nvPr>
+        </p:nvSpPr>
+        <p:spPr>
+          <a:xfrm>
+            <a:off x="0" y="4908385"/>
+            <a:ext cx="12191999" cy="1949616"/>
+          </a:xfrm>
+          <a:prstGeom prst="rect">
+            <a:avLst/>
+          </a:prstGeom>
+          <a:solidFill>
+            <a:srgbClr val="000000">
+              <a:alpha val="60000"/>
+            </a:srgbClr>
+          </a:solidFill>
+          <a:ln>
+            <a:noFill/>
+          </a:ln>
+        </p:spPr>
+        <p:style>
+          <a:lnRef idx="2">
+            <a:schemeClr val="accent1">
+              <a:shade val="50000"/>
+            </a:schemeClr>
+          </a:lnRef>
+          <a:fillRef idx="1">
+            <a:schemeClr val="accent1"/>
+          </a:fillRef>
+          <a:effectRef idx="0">
+            <a:schemeClr val="accent1"/>
+          </a:effectRef>
+          <a:fontRef idx="minor">
+            <a:schemeClr val="lt1"/>
+          </a:fontRef>
+        </p:style>
+        <p:txBody>
+          <a:bodyPr rtlCol="0" anchor="ctr"/>
+          <a:lstStyle/>
+          <a:p>
+            <a:pPr algn="ctr"/>
+            <a:endParaRPr lang="en-US"/>
+          </a:p>
+        </p:txBody>
+      </p:sp>
       <p:sp>
         <p:nvSpPr>
           <p:cNvPr id="2" name="Titre 1">
@@ -2355,18 +2418,19 @@
         </p:nvSpPr>
         <p:spPr>
           <a:xfrm>
-            <a:off x="2301923" y="1482602"/>
-            <a:ext cx="7588155" cy="2236264"/>
+            <a:off x="617365" y="5268812"/>
+            <a:ext cx="7260542" cy="1228763"/>
           </a:xfrm>
         </p:spPr>
         <p:txBody>
-          <a:bodyPr>
+          <a:bodyPr anchor="ctr">
             <a:normAutofit/>
           </a:bodyPr>
           <a:lstStyle/>
           <a:p>
-            <a:r>
-              <a:rPr lang="en-CA" sz="5400" dirty="0">
+            <a:pPr algn="l"/>
+            <a:r>
+              <a:rPr lang="en-CA">
                 <a:solidFill>
                   <a:srgbClr val="FFFFFF"/>
                 </a:solidFill>
@@ -2394,40 +2458,151 @@
         </p:nvSpPr>
         <p:spPr>
           <a:xfrm>
-            <a:off x="2301923" y="3793937"/>
-            <a:ext cx="7588155" cy="1414091"/>
+            <a:off x="7877908" y="5268812"/>
+            <a:ext cx="3808373" cy="1228763"/>
           </a:xfrm>
         </p:spPr>
         <p:txBody>
-          <a:bodyPr>
+          <a:bodyPr anchor="ctr">
             <a:normAutofit/>
           </a:bodyPr>
           <a:lstStyle/>
           <a:p>
-            <a:r>
-              <a:rPr lang="en-CA" sz="2200" dirty="0">
+            <a:pPr algn="r"/>
+            <a:r>
+              <a:rPr lang="en-CA">
                 <a:solidFill>
                   <a:srgbClr val="FFFFFF"/>
                 </a:solidFill>
               </a:rPr>
-              <a:t>Introduction a un 2e Dataset, Matrice, RMSE, Genre et </a:t>
-            </a:r>
-            <a:r>
-              <a:rPr lang="en-CA" sz="2200" dirty="0" err="1">
-                <a:solidFill>
-                  <a:srgbClr val="FFFFFF"/>
-                </a:solidFill>
-              </a:rPr>
-              <a:t>Suraprentissage</a:t>
-            </a:r>
-            <a:endParaRPr lang="en-CA" sz="2200" dirty="0">
-              <a:solidFill>
-                <a:srgbClr val="FFFFFF"/>
-              </a:solidFill>
-            </a:endParaRPr>
+              <a:t>Introduction a un 2e Dataset, Matrice, RMSE, Genre et Suraprentissage</a:t>
+            </a:r>
           </a:p>
         </p:txBody>
       </p:sp>
+      <p:pic>
+        <p:nvPicPr>
+          <p:cNvPr id="6" name="Image 5">
+            <a:extLst>
+              <a:ext uri="{FF2B5EF4-FFF2-40B4-BE49-F238E27FC236}">
+                <a16:creationId xmlns:a16="http://schemas.microsoft.com/office/drawing/2014/main" id="{CB6BCACC-AD74-2D0F-B191-E7287986B896}"/>
+              </a:ext>
+            </a:extLst>
+          </p:cNvPr>
+          <p:cNvPicPr>
+            <a:picLocks noChangeAspect="1"/>
+          </p:cNvPicPr>
+          <p:nvPr/>
+        </p:nvPicPr>
+        <p:blipFill>
+          <a:blip r:embed="rId3"/>
+          <a:stretch>
+            <a:fillRect/>
+          </a:stretch>
+        </p:blipFill>
+        <p:spPr>
+          <a:xfrm>
+            <a:off x="1333500" y="784489"/>
+            <a:ext cx="5437968" cy="2905125"/>
+          </a:xfrm>
+          <a:prstGeom prst="roundRect">
+            <a:avLst>
+              <a:gd name="adj" fmla="val 8594"/>
+            </a:avLst>
+          </a:prstGeom>
+          <a:solidFill>
+            <a:srgbClr val="FFFFFF">
+              <a:shade val="85000"/>
+            </a:srgbClr>
+          </a:solidFill>
+          <a:ln>
+            <a:noFill/>
+          </a:ln>
+          <a:effectLst>
+            <a:reflection blurRad="12700" stA="38000" endPos="28000" dist="5000" dir="5400000" sy="-100000" algn="bl" rotWithShape="0"/>
+          </a:effectLst>
+        </p:spPr>
+      </p:pic>
+      <p:pic>
+        <p:nvPicPr>
+          <p:cNvPr id="8" name="Image 7">
+            <a:extLst>
+              <a:ext uri="{FF2B5EF4-FFF2-40B4-BE49-F238E27FC236}">
+                <a16:creationId xmlns:a16="http://schemas.microsoft.com/office/drawing/2014/main" id="{18E19533-2DA3-24D4-F037-D4DEEEB52662}"/>
+              </a:ext>
+            </a:extLst>
+          </p:cNvPr>
+          <p:cNvPicPr>
+            <a:picLocks noChangeAspect="1"/>
+          </p:cNvPicPr>
+          <p:nvPr/>
+        </p:nvPicPr>
+        <p:blipFill>
+          <a:blip r:embed="rId4"/>
+          <a:stretch>
+            <a:fillRect/>
+          </a:stretch>
+        </p:blipFill>
+        <p:spPr>
+          <a:xfrm>
+            <a:off x="8294715" y="0"/>
+            <a:ext cx="3897265" cy="2237056"/>
+          </a:xfrm>
+          <a:prstGeom prst="rect">
+            <a:avLst/>
+          </a:prstGeom>
+          <a:ln>
+            <a:noFill/>
+          </a:ln>
+          <a:effectLst>
+            <a:outerShdw blurRad="292100" dist="139700" dir="2700000" algn="tl" rotWithShape="0">
+              <a:srgbClr val="333333">
+                <a:alpha val="65000"/>
+              </a:srgbClr>
+            </a:outerShdw>
+          </a:effectLst>
+        </p:spPr>
+      </p:pic>
+      <p:pic>
+        <p:nvPicPr>
+          <p:cNvPr id="10" name="Image 9">
+            <a:extLst>
+              <a:ext uri="{FF2B5EF4-FFF2-40B4-BE49-F238E27FC236}">
+                <a16:creationId xmlns:a16="http://schemas.microsoft.com/office/drawing/2014/main" id="{88C1FF25-12A4-DD02-804B-92C2F1A7987B}"/>
+              </a:ext>
+            </a:extLst>
+          </p:cNvPr>
+          <p:cNvPicPr>
+            <a:picLocks noChangeAspect="1"/>
+          </p:cNvPicPr>
+          <p:nvPr/>
+        </p:nvPicPr>
+        <p:blipFill>
+          <a:blip r:embed="rId5"/>
+          <a:stretch>
+            <a:fillRect/>
+          </a:stretch>
+        </p:blipFill>
+        <p:spPr>
+          <a:xfrm>
+            <a:off x="8294735" y="2237052"/>
+            <a:ext cx="3897265" cy="2671328"/>
+          </a:xfrm>
+          <a:prstGeom prst="rect">
+            <a:avLst/>
+          </a:prstGeom>
+          <a:ln>
+            <a:noFill/>
+          </a:ln>
+          <a:effectLst>
+            <a:outerShdw blurRad="292100" dist="139700" dir="2700000" algn="tl" rotWithShape="0">
+              <a:srgbClr val="333333">
+                <a:alpha val="65000"/>
+              </a:srgbClr>
+            </a:outerShdw>
+          </a:effectLst>
+        </p:spPr>
+      </p:pic>
     </p:spTree>
     <p:extLst>
       <p:ext uri="{BB962C8B-B14F-4D97-AF65-F5344CB8AC3E}">
@@ -2850,7 +3025,11 @@
             <a:noFill/>
           </a:ln>
           <a:effectLst>
-            <a:softEdge rad="112500"/>
+            <a:outerShdw blurRad="292100" dist="139700" dir="2700000" algn="tl" rotWithShape="0">
+              <a:srgbClr val="333333">
+                <a:alpha val="65000"/>
+              </a:srgbClr>
+            </a:outerShdw>
           </a:effectLst>
         </p:spPr>
       </p:pic>
@@ -3964,8 +4143,8 @@
         </p:blipFill>
         <p:spPr>
           <a:xfrm>
-            <a:off x="8252971" y="4295759"/>
-            <a:ext cx="3939009" cy="2562241"/>
+            <a:off x="7201912" y="4295759"/>
+            <a:ext cx="5099128" cy="2562241"/>
           </a:xfrm>
           <a:prstGeom prst="rect">
             <a:avLst/>
@@ -3994,8 +4173,8 @@
         </p:blipFill>
         <p:spPr>
           <a:xfrm>
-            <a:off x="8988906" y="-2"/>
-            <a:ext cx="3203074" cy="4295761"/>
+            <a:off x="9421740" y="-2"/>
+            <a:ext cx="2770240" cy="4295761"/>
           </a:xfrm>
           <a:prstGeom prst="rect">
             <a:avLst/>
@@ -4024,8 +4203,38 @@
         </p:blipFill>
         <p:spPr>
           <a:xfrm>
-            <a:off x="3571875" y="-2"/>
-            <a:ext cx="5417011" cy="4295761"/>
+            <a:off x="4721622" y="-3"/>
+            <a:ext cx="4700107" cy="4295761"/>
+          </a:xfrm>
+          <a:prstGeom prst="rect">
+            <a:avLst/>
+          </a:prstGeom>
+        </p:spPr>
+      </p:pic>
+      <p:pic>
+        <p:nvPicPr>
+          <p:cNvPr id="9" name="Image 8">
+            <a:extLst>
+              <a:ext uri="{FF2B5EF4-FFF2-40B4-BE49-F238E27FC236}">
+                <a16:creationId xmlns:a16="http://schemas.microsoft.com/office/drawing/2014/main" id="{25219425-D8DA-A790-0324-C85D1A15A6E6}"/>
+              </a:ext>
+            </a:extLst>
+          </p:cNvPr>
+          <p:cNvPicPr>
+            <a:picLocks noChangeAspect="1"/>
+          </p:cNvPicPr>
+          <p:nvPr/>
+        </p:nvPicPr>
+        <p:blipFill>
+          <a:blip r:embed="rId7"/>
+          <a:stretch>
+            <a:fillRect/>
+          </a:stretch>
+        </p:blipFill>
+        <p:spPr>
+          <a:xfrm>
+            <a:off x="0" y="0"/>
+            <a:ext cx="4721602" cy="4295759"/>
           </a:xfrm>
           <a:prstGeom prst="rect">
             <a:avLst/>

--- a/RecFilmsUA3.pptx
+++ b/RecFilmsUA3.pptx
@@ -5,7 +5,7 @@
     <p:sldMasterId id="2147483713" r:id="rId1"/>
   </p:sldMasterIdLst>
   <p:notesMasterIdLst>
-    <p:notesMasterId r:id="rId10"/>
+    <p:notesMasterId r:id="rId11"/>
   </p:notesMasterIdLst>
   <p:sldIdLst>
     <p:sldId id="256" r:id="rId2"/>
@@ -13,9 +13,10 @@
     <p:sldId id="262" r:id="rId4"/>
     <p:sldId id="260" r:id="rId5"/>
     <p:sldId id="261" r:id="rId6"/>
-    <p:sldId id="263" r:id="rId7"/>
-    <p:sldId id="264" r:id="rId8"/>
-    <p:sldId id="265" r:id="rId9"/>
+    <p:sldId id="266" r:id="rId7"/>
+    <p:sldId id="263" r:id="rId8"/>
+    <p:sldId id="264" r:id="rId9"/>
+    <p:sldId id="265" r:id="rId10"/>
   </p:sldIdLst>
   <p:sldSz cx="12192000" cy="6858000"/>
   <p:notesSz cx="6858000" cy="9144000"/>
@@ -257,7 +258,7 @@
           <a:p>
             <a:fld id="{A92E5350-3EDC-40D8-A7EE-3A904327B402}" type="datetimeFigureOut">
               <a:rPr lang="en-CA" smtClean="0"/>
-              <a:t>2026-04-18</a:t>
+              <a:t>2026-04-19</a:t>
             </a:fld>
             <a:endParaRPr lang="en-CA"/>
           </a:p>
@@ -590,7 +591,7 @@
           <a:p>
             <a:fld id="{41291D9F-149D-4022-B9FD-6A3CE887ACEA}" type="slidenum">
               <a:rPr lang="en-CA" smtClean="0"/>
-              <a:t>7</a:t>
+              <a:t>8</a:t>
             </a:fld>
             <a:endParaRPr lang="en-CA"/>
           </a:p>
@@ -760,7 +761,7 @@
           <a:p>
             <a:fld id="{C128FA71-3A18-48C0-980F-4B68F7F63042}" type="datetime1">
               <a:rPr lang="en-US" smtClean="0"/>
-              <a:t>4/18/2026</a:t>
+              <a:t>4/19/2026</a:t>
             </a:fld>
             <a:endParaRPr lang="en-US"/>
           </a:p>
@@ -999,7 +1000,7 @@
           <a:p>
             <a:fld id="{67F45AC6-C491-4585-A584-9CE2AF7D5500}" type="datetime1">
               <a:rPr lang="en-US" smtClean="0"/>
-              <a:t>4/18/2026</a:t>
+              <a:t>4/19/2026</a:t>
             </a:fld>
             <a:endParaRPr lang="en-US"/>
           </a:p>
@@ -3059,7 +3060,7 @@
         </p:blipFill>
         <p:spPr>
           <a:xfrm>
-            <a:off x="1" y="1"/>
+            <a:off x="-495300" y="0"/>
             <a:ext cx="12192000" cy="6857999"/>
           </a:xfrm>
           <a:prstGeom prst="rect">
@@ -3085,8 +3086,8 @@
         </p:nvSpPr>
         <p:spPr>
           <a:xfrm>
-            <a:off x="2301923" y="1482602"/>
-            <a:ext cx="7588155" cy="2236264"/>
+            <a:off x="0" y="987909"/>
+            <a:ext cx="5022801" cy="885825"/>
           </a:xfrm>
         </p:spPr>
         <p:txBody>
@@ -3121,123 +3122,259 @@
       </p:sp>
       <p:sp>
         <p:nvSpPr>
-          <p:cNvPr id="3" name="Sous-titre 2">
-            <a:extLst>
-              <a:ext uri="{FF2B5EF4-FFF2-40B4-BE49-F238E27FC236}">
-                <a16:creationId xmlns:a16="http://schemas.microsoft.com/office/drawing/2014/main" id="{562F10FD-E35D-40A9-F8B7-B016A4D205EA}"/>
+          <p:cNvPr id="7" name="Rectangle 1">
+            <a:extLst>
+              <a:ext uri="{FF2B5EF4-FFF2-40B4-BE49-F238E27FC236}">
+                <a16:creationId xmlns:a16="http://schemas.microsoft.com/office/drawing/2014/main" id="{1CBD2A2E-4817-B7F0-845A-89183B19DF4A}"/>
               </a:ext>
             </a:extLst>
           </p:cNvPr>
           <p:cNvSpPr>
-            <a:spLocks noGrp="1"/>
+            <a:spLocks noGrp="1" noChangeArrowheads="1"/>
           </p:cNvSpPr>
           <p:nvPr>
             <p:ph type="subTitle" idx="1"/>
           </p:nvPr>
         </p:nvSpPr>
-        <p:spPr>
-          <a:xfrm>
-            <a:off x="2301923" y="3793937"/>
-            <a:ext cx="7588155" cy="1414091"/>
-          </a:xfrm>
+        <p:spPr bwMode="auto">
+          <a:xfrm>
+            <a:off x="0" y="1949450"/>
+            <a:ext cx="7588250" cy="1414463"/>
+          </a:xfrm>
+          <a:prstGeom prst="rect">
+            <a:avLst/>
+          </a:prstGeom>
+          <a:noFill/>
+          <a:ln>
+            <a:noFill/>
+          </a:ln>
+          <a:effectLst/>
+          <a:extLst>
+            <a:ext uri="{909E8E84-426E-40DD-AFC4-6F175D3DCCD1}">
+              <a14:hiddenFill xmlns:a14="http://schemas.microsoft.com/office/drawing/2010/main">
+                <a:solidFill>
+                  <a:schemeClr val="accent1"/>
+                </a:solidFill>
+              </a14:hiddenFill>
+            </a:ext>
+            <a:ext uri="{91240B29-F687-4F45-9708-019B960494DF}">
+              <a14:hiddenLine xmlns:a14="http://schemas.microsoft.com/office/drawing/2010/main" w="9525">
+                <a:solidFill>
+                  <a:schemeClr val="tx1"/>
+                </a:solidFill>
+                <a:miter lim="800000"/>
+                <a:headEnd/>
+                <a:tailEnd/>
+              </a14:hiddenLine>
+            </a:ext>
+            <a:ext uri="{AF507438-7753-43E0-B8FC-AC1667EBCBE1}">
+              <a14:hiddenEffects xmlns:a14="http://schemas.microsoft.com/office/drawing/2010/main">
+                <a:effectLst>
+                  <a:outerShdw dist="35921" dir="2700000" algn="ctr" rotWithShape="0">
+                    <a:schemeClr val="bg2"/>
+                  </a:outerShdw>
+                </a:effectLst>
+              </a14:hiddenEffects>
+            </a:ext>
+          </a:extLst>
         </p:spPr>
         <p:txBody>
-          <a:bodyPr>
-            <a:normAutofit/>
+          <a:bodyPr vert="horz" wrap="none" lIns="91440" tIns="45720" rIns="91440" bIns="45720" numCol="1" anchor="ctr" anchorCtr="0" compatLnSpc="1">
+            <a:prstTxWarp prst="textNoShape">
+              <a:avLst/>
+            </a:prstTxWarp>
+            <a:spAutoFit/>
           </a:bodyPr>
           <a:lstStyle/>
           <a:p>
+            <a:pPr marL="0" marR="0" lvl="0" indent="0" algn="l" defTabSz="914400" rtl="0" eaLnBrk="0" fontAlgn="base" latinLnBrk="0" hangingPunct="0">
+              <a:lnSpc>
+                <a:spcPct val="100000"/>
+              </a:lnSpc>
+              <a:spcBef>
+                <a:spcPct val="0"/>
+              </a:spcBef>
+              <a:spcAft>
+                <a:spcPct val="0"/>
+              </a:spcAft>
+              <a:buClrTx/>
+              <a:buSzTx/>
+              <a:buFontTx/>
+              <a:buNone/>
+              <a:tabLst/>
+            </a:pPr>
+            <a:endParaRPr kumimoji="0" lang="fr-FR" altLang="fr-FR" sz="1800" b="0" i="0" u="none" strike="noStrike" cap="none" normalizeH="0" baseline="0">
+              <a:ln>
+                <a:noFill/>
+              </a:ln>
+              <a:solidFill>
+                <a:schemeClr val="tx1"/>
+              </a:solidFill>
+              <a:effectLst/>
+              <a:latin typeface="Arial" panose="020B0604020202020204" pitchFamily="34" charset="0"/>
+            </a:endParaRPr>
+          </a:p>
+          <a:p>
+            <a:pPr marL="0" marR="0" lvl="0" indent="0" algn="l" defTabSz="914400" rtl="0" eaLnBrk="0" fontAlgn="base" latinLnBrk="0" hangingPunct="0">
+              <a:lnSpc>
+                <a:spcPct val="100000"/>
+              </a:lnSpc>
+              <a:spcBef>
+                <a:spcPct val="0"/>
+              </a:spcBef>
+              <a:spcAft>
+                <a:spcPct val="0"/>
+              </a:spcAft>
+              <a:buClrTx/>
+              <a:buSzTx/>
+              <a:buFontTx/>
+              <a:buChar char="•"/>
+              <a:tabLst/>
+            </a:pPr>
             <a:r>
-              <a:rPr lang="en-CA" sz="2200" dirty="0">
+              <a:rPr kumimoji="0" lang="fr-FR" altLang="fr-FR" sz="1800" b="0" i="0" u="none" strike="noStrike" cap="none" normalizeH="0" baseline="0">
+                <a:ln>
+                  <a:noFill/>
+                </a:ln>
                 <a:solidFill>
-                  <a:srgbClr val="FFFFFF"/>
+                  <a:schemeClr val="tx1"/>
                 </a:solidFill>
+                <a:effectLst/>
+                <a:latin typeface="Arial" panose="020B0604020202020204" pitchFamily="34" charset="0"/>
               </a:rPr>
-              <a:t>“</a:t>
+              <a:t>Le modèle prédit très bien les "Like" </a:t>
             </a:r>
+          </a:p>
+          <a:p>
+            <a:pPr marL="0" marR="0" lvl="0" indent="0" algn="l" defTabSz="914400" rtl="0" eaLnBrk="0" fontAlgn="base" latinLnBrk="0" hangingPunct="0">
+              <a:lnSpc>
+                <a:spcPct val="100000"/>
+              </a:lnSpc>
+              <a:spcBef>
+                <a:spcPct val="0"/>
+              </a:spcBef>
+              <a:spcAft>
+                <a:spcPct val="0"/>
+              </a:spcAft>
+              <a:buClrTx/>
+              <a:buSzTx/>
+              <a:buFontTx/>
+              <a:buChar char="•"/>
+              <a:tabLst/>
+            </a:pPr>
             <a:r>
-              <a:rPr lang="en-CA" sz="2200" dirty="0" err="1">
+              <a:rPr kumimoji="0" lang="fr-FR" altLang="fr-FR" sz="1800" b="0" i="0" u="none" strike="noStrike" cap="none" normalizeH="0" baseline="0">
+                <a:ln>
+                  <a:noFill/>
+                </a:ln>
                 <a:solidFill>
-                  <a:srgbClr val="FFFFFF"/>
+                  <a:schemeClr val="tx1"/>
                 </a:solidFill>
+                <a:effectLst/>
+                <a:latin typeface="Arial" panose="020B0604020202020204" pitchFamily="34" charset="0"/>
               </a:rPr>
-              <a:t>Écris</a:t>
+              <a:t>Il prédit presque tous les films comme "Like" </a:t>
             </a:r>
+          </a:p>
+          <a:p>
+            <a:pPr marL="0" marR="0" lvl="0" indent="0" algn="l" defTabSz="914400" rtl="0" eaLnBrk="0" fontAlgn="base" latinLnBrk="0" hangingPunct="0">
+              <a:lnSpc>
+                <a:spcPct val="100000"/>
+              </a:lnSpc>
+              <a:spcBef>
+                <a:spcPct val="0"/>
+              </a:spcBef>
+              <a:spcAft>
+                <a:spcPct val="0"/>
+              </a:spcAft>
+              <a:buClrTx/>
+              <a:buSzTx/>
+              <a:buFontTx/>
+              <a:buChar char="•"/>
+              <a:tabLst/>
+            </a:pPr>
             <a:r>
-              <a:rPr lang="en-CA" sz="2200" dirty="0">
+              <a:rPr kumimoji="0" lang="fr-FR" altLang="fr-FR" sz="1800" b="0" i="0" u="none" strike="noStrike" cap="none" normalizeH="0" baseline="0">
+                <a:ln>
+                  <a:noFill/>
+                </a:ln>
                 <a:solidFill>
-                  <a:srgbClr val="FFFFFF"/>
+                  <a:schemeClr val="tx1"/>
                 </a:solidFill>
+                <a:effectLst/>
+                <a:latin typeface="Arial" panose="020B0604020202020204" pitchFamily="34" charset="0"/>
               </a:rPr>
-              <a:t> un résumé de </a:t>
+              <a:t>Il ne reconnaît pas bien les "Dislike" </a:t>
             </a:r>
+          </a:p>
+          <a:p>
+            <a:pPr marL="0" marR="0" lvl="0" indent="0" algn="l" defTabSz="914400" rtl="0" eaLnBrk="0" fontAlgn="base" latinLnBrk="0" hangingPunct="0">
+              <a:lnSpc>
+                <a:spcPct val="100000"/>
+              </a:lnSpc>
+              <a:spcBef>
+                <a:spcPct val="0"/>
+              </a:spcBef>
+              <a:spcAft>
+                <a:spcPct val="0"/>
+              </a:spcAft>
+              <a:buClrTx/>
+              <a:buSzTx/>
+              <a:buFontTx/>
+              <a:buChar char="•"/>
+              <a:tabLst/>
+            </a:pPr>
             <a:r>
-              <a:rPr lang="en-CA" sz="2200" dirty="0" err="1">
+              <a:rPr kumimoji="0" lang="fr-FR" altLang="fr-FR" sz="1800" b="0" i="0" u="none" strike="noStrike" cap="none" normalizeH="0" baseline="0">
+                <a:ln>
+                  <a:noFill/>
+                </a:ln>
                 <a:solidFill>
-                  <a:srgbClr val="FFFFFF"/>
+                  <a:schemeClr val="tx1"/>
                 </a:solidFill>
+                <a:effectLst/>
+                <a:latin typeface="Arial" panose="020B0604020202020204" pitchFamily="34" charset="0"/>
               </a:rPr>
-              <a:t>ce</a:t>
+              <a:t>Le modèle est déséquilibré </a:t>
             </a:r>
-            <a:r>
-              <a:rPr lang="en-CA" sz="2200" dirty="0">
-                <a:solidFill>
-                  <a:srgbClr val="FFFFFF"/>
-                </a:solidFill>
-              </a:rPr>
-              <a:t> qui </a:t>
-            </a:r>
-            <a:r>
-              <a:rPr lang="en-CA" sz="2200" dirty="0" err="1">
-                <a:solidFill>
-                  <a:srgbClr val="FFFFFF"/>
-                </a:solidFill>
-              </a:rPr>
-              <a:t>s’est</a:t>
-            </a:r>
-            <a:r>
-              <a:rPr lang="en-CA" sz="2200" dirty="0">
-                <a:solidFill>
-                  <a:srgbClr val="FFFFFF"/>
-                </a:solidFill>
-              </a:rPr>
-              <a:t> passer + image </a:t>
-            </a:r>
-            <a:r>
-              <a:rPr lang="en-CA" sz="2200" dirty="0" err="1">
-                <a:solidFill>
-                  <a:srgbClr val="FFFFFF"/>
-                </a:solidFill>
-              </a:rPr>
-              <a:t>si</a:t>
-            </a:r>
-            <a:r>
-              <a:rPr lang="en-CA" sz="2200" dirty="0">
-                <a:solidFill>
-                  <a:srgbClr val="FFFFFF"/>
-                </a:solidFill>
-              </a:rPr>
-              <a:t> </a:t>
-            </a:r>
-            <a:r>
-              <a:rPr lang="en-CA" sz="2200" dirty="0" err="1">
-                <a:solidFill>
-                  <a:srgbClr val="FFFFFF"/>
-                </a:solidFill>
-              </a:rPr>
-              <a:t>t’en</a:t>
-            </a:r>
-            <a:r>
-              <a:rPr lang="en-CA" sz="2200" dirty="0">
-                <a:solidFill>
-                  <a:srgbClr val="FFFFFF"/>
-                </a:solidFill>
-              </a:rPr>
-              <a:t> as”</a:t>
-            </a:r>
           </a:p>
         </p:txBody>
       </p:sp>
+      <p:pic>
+        <p:nvPicPr>
+          <p:cNvPr id="8" name="Image 7">
+            <a:extLst>
+              <a:ext uri="{FF2B5EF4-FFF2-40B4-BE49-F238E27FC236}">
+                <a16:creationId xmlns:a16="http://schemas.microsoft.com/office/drawing/2014/main" id="{D75D9F41-8B0F-6D8D-2751-0ACC15580E72}"/>
+              </a:ext>
+            </a:extLst>
+          </p:cNvPr>
+          <p:cNvPicPr>
+            <a:picLocks noChangeAspect="1"/>
+          </p:cNvPicPr>
+          <p:nvPr/>
+        </p:nvPicPr>
+        <p:blipFill>
+          <a:blip r:embed="rId3">
+            <a:extLst>
+              <a:ext uri="{28A0092B-C50C-407E-A947-70E740481C1C}">
+                <a14:useLocalDpi xmlns:a14="http://schemas.microsoft.com/office/drawing/2010/main" val="0"/>
+              </a:ext>
+            </a:extLst>
+          </a:blip>
+          <a:srcRect/>
+          <a:stretch/>
+        </p:blipFill>
+        <p:spPr>
+          <a:xfrm>
+            <a:off x="326763" y="3866583"/>
+            <a:ext cx="5117153" cy="2122515"/>
+          </a:xfrm>
+          <a:prstGeom prst="rect">
+            <a:avLst/>
+          </a:prstGeom>
+        </p:spPr>
+      </p:pic>
     </p:spTree>
     <p:extLst>
       <p:ext uri="{BB962C8B-B14F-4D97-AF65-F5344CB8AC3E}">
@@ -3252,6 +3389,247 @@
 </file>
 
 <file path=ppt/slides/slide6.xml><?xml version="1.0" encoding="utf-8"?>
+<p:sld xmlns:a="http://schemas.openxmlformats.org/drawingml/2006/main" xmlns:r="http://schemas.openxmlformats.org/officeDocument/2006/relationships" xmlns:p="http://schemas.openxmlformats.org/presentationml/2006/main">
+  <p:cSld>
+    <p:bg>
+      <p:bgPr>
+        <a:solidFill>
+          <a:schemeClr val="bg1"/>
+        </a:solidFill>
+        <a:effectLst/>
+      </p:bgPr>
+    </p:bg>
+    <p:spTree>
+      <p:nvGrpSpPr>
+        <p:cNvPr id="1" name="">
+          <a:extLst>
+            <a:ext uri="{FF2B5EF4-FFF2-40B4-BE49-F238E27FC236}">
+              <a16:creationId xmlns:a16="http://schemas.microsoft.com/office/drawing/2014/main" id="{2CB56464-E3D9-9F82-DF34-F5B075EEF792}"/>
+            </a:ext>
+          </a:extLst>
+        </p:cNvPr>
+        <p:cNvGrpSpPr/>
+        <p:nvPr/>
+      </p:nvGrpSpPr>
+      <p:grpSpPr>
+        <a:xfrm>
+          <a:off x="0" y="0"/>
+          <a:ext cx="0" cy="0"/>
+          <a:chOff x="0" y="0"/>
+          <a:chExt cx="0" cy="0"/>
+        </a:xfrm>
+      </p:grpSpPr>
+      <p:sp useBgFill="1">
+        <p:nvSpPr>
+          <p:cNvPr id="31" name="Rectangle 30">
+            <a:extLst>
+              <a:ext uri="{FF2B5EF4-FFF2-40B4-BE49-F238E27FC236}">
+                <a16:creationId xmlns:a16="http://schemas.microsoft.com/office/drawing/2014/main" id="{648180FE-5FA3-6292-E001-7B163AB045F2}"/>
+              </a:ext>
+              <a:ext uri="{C183D7F6-B498-43B3-948B-1728B52AA6E4}">
+                <adec:decorative xmlns:adec="http://schemas.microsoft.com/office/drawing/2017/decorative" val="1"/>
+              </a:ext>
+            </a:extLst>
+          </p:cNvPr>
+          <p:cNvSpPr>
+            <a:spLocks noGrp="1" noRot="1" noChangeAspect="1" noMove="1" noResize="1" noEditPoints="1" noAdjustHandles="1" noChangeArrowheads="1" noChangeShapeType="1" noTextEdit="1"/>
+          </p:cNvSpPr>
+          <p:nvPr>
+            <p:extLst>
+              <p:ext uri="{386F3935-93C4-4BCD-93E2-E3B085C9AB24}">
+                <p16:designElem xmlns:p16="http://schemas.microsoft.com/office/powerpoint/2015/main" val="1"/>
+              </p:ext>
+            </p:extLst>
+          </p:nvPr>
+        </p:nvSpPr>
+        <p:spPr>
+          <a:xfrm>
+            <a:off x="0" y="0"/>
+            <a:ext cx="12192000" cy="6858000"/>
+          </a:xfrm>
+          <a:prstGeom prst="rect">
+            <a:avLst/>
+          </a:prstGeom>
+          <a:ln w="12700" cap="flat" cmpd="sng" algn="ctr">
+            <a:noFill/>
+            <a:prstDash val="solid"/>
+            <a:miter lim="800000"/>
+          </a:ln>
+          <a:effectLst/>
+          <a:extLst>
+            <a:ext uri="{91240B29-F687-4F45-9708-019B960494DF}">
+              <a14:hiddenLine xmlns:a14="http://schemas.microsoft.com/office/drawing/2010/main" w="12700" cap="flat" cmpd="sng" algn="ctr">
+                <a:solidFill>
+                  <a:schemeClr val="accent1">
+                    <a:shade val="15000"/>
+                  </a:schemeClr>
+                </a:solidFill>
+                <a:prstDash val="solid"/>
+                <a:miter lim="800000"/>
+              </a14:hiddenLine>
+            </a:ext>
+          </a:extLst>
+        </p:spPr>
+        <p:style>
+          <a:lnRef idx="2">
+            <a:schemeClr val="accent1">
+              <a:shade val="15000"/>
+            </a:schemeClr>
+          </a:lnRef>
+          <a:fillRef idx="1">
+            <a:schemeClr val="accent1"/>
+          </a:fillRef>
+          <a:effectRef idx="0">
+            <a:schemeClr val="accent1"/>
+          </a:effectRef>
+          <a:fontRef idx="minor">
+            <a:schemeClr val="lt1"/>
+          </a:fontRef>
+        </p:style>
+        <p:txBody>
+          <a:bodyPr rtlCol="0" anchor="ctr"/>
+          <a:lstStyle/>
+          <a:p>
+            <a:pPr algn="ctr"/>
+            <a:endParaRPr lang="en-US"/>
+          </a:p>
+        </p:txBody>
+      </p:sp>
+      <p:pic>
+        <p:nvPicPr>
+          <p:cNvPr id="4" name="Picture 3">
+            <a:extLst>
+              <a:ext uri="{FF2B5EF4-FFF2-40B4-BE49-F238E27FC236}">
+                <a16:creationId xmlns:a16="http://schemas.microsoft.com/office/drawing/2014/main" id="{A3227686-8496-1CD6-6CE3-2BFC294B378D}"/>
+              </a:ext>
+            </a:extLst>
+          </p:cNvPr>
+          <p:cNvPicPr>
+            <a:picLocks noChangeAspect="1"/>
+          </p:cNvPicPr>
+          <p:nvPr/>
+        </p:nvPicPr>
+        <p:blipFill>
+          <a:blip r:embed="rId2">
+            <a:alphaModFix amt="60000"/>
+          </a:blip>
+          <a:srcRect t="14243" b="6252"/>
+          <a:stretch>
+            <a:fillRect/>
+          </a:stretch>
+        </p:blipFill>
+        <p:spPr>
+          <a:xfrm>
+            <a:off x="1" y="1"/>
+            <a:ext cx="12192000" cy="6857999"/>
+          </a:xfrm>
+          <a:prstGeom prst="rect">
+            <a:avLst/>
+          </a:prstGeom>
+        </p:spPr>
+      </p:pic>
+      <p:sp>
+        <p:nvSpPr>
+          <p:cNvPr id="2" name="Titre 1">
+            <a:extLst>
+              <a:ext uri="{FF2B5EF4-FFF2-40B4-BE49-F238E27FC236}">
+                <a16:creationId xmlns:a16="http://schemas.microsoft.com/office/drawing/2014/main" id="{1204C7AF-657D-2C47-2F26-951C6398DD61}"/>
+              </a:ext>
+            </a:extLst>
+          </p:cNvPr>
+          <p:cNvSpPr>
+            <a:spLocks noGrp="1"/>
+          </p:cNvSpPr>
+          <p:nvPr>
+            <p:ph type="ctrTitle"/>
+          </p:nvPr>
+        </p:nvSpPr>
+        <p:spPr>
+          <a:xfrm>
+            <a:off x="2301923" y="1482602"/>
+            <a:ext cx="7588155" cy="2236264"/>
+          </a:xfrm>
+        </p:spPr>
+        <p:txBody>
+          <a:bodyPr>
+            <a:normAutofit/>
+          </a:bodyPr>
+          <a:lstStyle/>
+          <a:p>
+            <a:r>
+              <a:rPr lang="en-CA" sz="5400" dirty="0">
+                <a:solidFill>
+                  <a:srgbClr val="FFFFFF"/>
+                </a:solidFill>
+              </a:rPr>
+              <a:t>SVM </a:t>
+            </a:r>
+            <a:r>
+              <a:rPr lang="en-CA" sz="5400" dirty="0" err="1">
+                <a:solidFill>
+                  <a:srgbClr val="FFFFFF"/>
+                </a:solidFill>
+              </a:rPr>
+              <a:t>Linéaire</a:t>
+            </a:r>
+            <a:endParaRPr lang="en-CA" sz="5400" dirty="0">
+              <a:solidFill>
+                <a:srgbClr val="FFFFFF"/>
+              </a:solidFill>
+            </a:endParaRPr>
+          </a:p>
+        </p:txBody>
+      </p:sp>
+      <p:sp>
+        <p:nvSpPr>
+          <p:cNvPr id="3" name="Sous-titre 2">
+            <a:extLst>
+              <a:ext uri="{FF2B5EF4-FFF2-40B4-BE49-F238E27FC236}">
+                <a16:creationId xmlns:a16="http://schemas.microsoft.com/office/drawing/2014/main" id="{F4ECA444-FE09-E398-10B8-C4ED98F4439B}"/>
+              </a:ext>
+            </a:extLst>
+          </p:cNvPr>
+          <p:cNvSpPr>
+            <a:spLocks noGrp="1"/>
+          </p:cNvSpPr>
+          <p:nvPr>
+            <p:ph type="subTitle" idx="1"/>
+          </p:nvPr>
+        </p:nvSpPr>
+        <p:spPr>
+          <a:xfrm>
+            <a:off x="2301923" y="3793937"/>
+            <a:ext cx="7588155" cy="1414091"/>
+          </a:xfrm>
+        </p:spPr>
+        <p:txBody>
+          <a:bodyPr>
+            <a:normAutofit/>
+          </a:bodyPr>
+          <a:lstStyle/>
+          <a:p>
+            <a:endParaRPr lang="en-CA" sz="2200" dirty="0">
+              <a:solidFill>
+                <a:srgbClr val="FFFFFF"/>
+              </a:solidFill>
+            </a:endParaRPr>
+          </a:p>
+        </p:txBody>
+      </p:sp>
+    </p:spTree>
+    <p:extLst>
+      <p:ext uri="{BB962C8B-B14F-4D97-AF65-F5344CB8AC3E}">
+        <p14:creationId xmlns:p14="http://schemas.microsoft.com/office/powerpoint/2010/main" val="2924282221"/>
+      </p:ext>
+    </p:extLst>
+  </p:cSld>
+  <p:clrMapOvr>
+    <a:overrideClrMapping bg1="dk1" tx1="lt1" bg2="dk2" tx2="lt2" accent1="accent1" accent2="accent2" accent3="accent3" accent4="accent4" accent5="accent5" accent6="accent6" hlink="hlink" folHlink="folHlink"/>
+  </p:clrMapOvr>
+</p:sld>
+</file>
+
+<file path=ppt/slides/slide7.xml><?xml version="1.0" encoding="utf-8"?>
 <p:sld xmlns:a="http://schemas.openxmlformats.org/drawingml/2006/main" xmlns:r="http://schemas.openxmlformats.org/officeDocument/2006/relationships" xmlns:p="http://schemas.openxmlformats.org/presentationml/2006/main">
   <p:cSld>
     <p:bg>
@@ -3615,7 +3993,7 @@
 </p:sld>
 </file>
 
-<file path=ppt/slides/slide7.xml><?xml version="1.0" encoding="utf-8"?>
+<file path=ppt/slides/slide8.xml><?xml version="1.0" encoding="utf-8"?>
 <p:sld xmlns:a="http://schemas.openxmlformats.org/drawingml/2006/main" xmlns:r="http://schemas.openxmlformats.org/officeDocument/2006/relationships" xmlns:p="http://schemas.openxmlformats.org/presentationml/2006/main">
   <p:cSld>
     <p:bg>
@@ -4045,7 +4423,7 @@
 </p:sld>
 </file>
 
-<file path=ppt/slides/slide8.xml><?xml version="1.0" encoding="utf-8"?>
+<file path=ppt/slides/slide9.xml><?xml version="1.0" encoding="utf-8"?>
 <p:sld xmlns:a="http://schemas.openxmlformats.org/drawingml/2006/main" xmlns:r="http://schemas.openxmlformats.org/officeDocument/2006/relationships" xmlns:p="http://schemas.openxmlformats.org/presentationml/2006/main">
   <p:cSld>
     <p:bg>

--- a/RecFilmsUA3.pptx
+++ b/RecFilmsUA3.pptx
@@ -3060,7 +3060,7 @@
         </p:blipFill>
         <p:spPr>
           <a:xfrm>
-            <a:off x="-495300" y="0"/>
+            <a:off x="0" y="0"/>
             <a:ext cx="12192000" cy="6857999"/>
           </a:xfrm>
           <a:prstGeom prst="rect">

--- a/RecFilmsUA3.pptx
+++ b/RecFilmsUA3.pptx
@@ -3060,7 +3060,7 @@
         </p:blipFill>
         <p:spPr>
           <a:xfrm>
-            <a:off x="0" y="0"/>
+            <a:off x="0" y="1"/>
             <a:ext cx="12192000" cy="6857999"/>
           </a:xfrm>
           <a:prstGeom prst="rect">
@@ -3092,7 +3092,7 @@
         </p:spPr>
         <p:txBody>
           <a:bodyPr>
-            <a:normAutofit/>
+            <a:normAutofit fontScale="90000"/>
           </a:bodyPr>
           <a:lstStyle/>
           <a:p>
@@ -3112,11 +3112,14 @@
               </a:rPr>
               <a:t>Linéaire</a:t>
             </a:r>
-            <a:endParaRPr lang="en-CA" sz="5400" dirty="0">
-              <a:solidFill>
-                <a:srgbClr val="FFFFFF"/>
-              </a:solidFill>
-            </a:endParaRPr>
+            <a:r>
+              <a:rPr lang="en-CA" sz="5400" dirty="0">
+                <a:solidFill>
+                  <a:srgbClr val="FFFFFF"/>
+                </a:solidFill>
+              </a:rPr>
+              <a:t> ET  API</a:t>
+            </a:r>
           </a:p>
         </p:txBody>
       </p:sp>
@@ -3375,6 +3378,71 @@
           </a:prstGeom>
         </p:spPr>
       </p:pic>
+      <p:pic>
+        <p:nvPicPr>
+          <p:cNvPr id="5" name="Image 4" descr="The image shows a command prompt window displaying a running localhost server, with options to press CTRL+C to stop it and a debug mode with a specified pin number.&#10;&#10;Le contenu généré par l’IA peut être incorrect.">
+            <a:extLst>
+              <a:ext uri="{FF2B5EF4-FFF2-40B4-BE49-F238E27FC236}">
+                <a16:creationId xmlns:a16="http://schemas.microsoft.com/office/drawing/2014/main" id="{AC05CA7F-E7F8-EDC6-5CBA-346B1151046C}"/>
+              </a:ext>
+            </a:extLst>
+          </p:cNvPr>
+          <p:cNvPicPr>
+            <a:picLocks noChangeAspect="1"/>
+          </p:cNvPicPr>
+          <p:nvPr/>
+        </p:nvPicPr>
+        <p:blipFill>
+          <a:blip r:embed="rId4"/>
+          <a:stretch>
+            <a:fillRect/>
+          </a:stretch>
+        </p:blipFill>
+        <p:spPr>
+          <a:xfrm>
+            <a:off x="5921954" y="3800047"/>
+            <a:ext cx="5792008" cy="2038635"/>
+          </a:xfrm>
+          <a:prstGeom prst="rect">
+            <a:avLst/>
+          </a:prstGeom>
+        </p:spPr>
+      </p:pic>
+      <p:sp>
+        <p:nvSpPr>
+          <p:cNvPr id="10" name="ZoneTexte 9">
+            <a:extLst>
+              <a:ext uri="{FF2B5EF4-FFF2-40B4-BE49-F238E27FC236}">
+                <a16:creationId xmlns:a16="http://schemas.microsoft.com/office/drawing/2014/main" id="{56E2FFD0-FA20-1B16-5F14-9B21218181A9}"/>
+              </a:ext>
+            </a:extLst>
+          </p:cNvPr>
+          <p:cNvSpPr txBox="1"/>
+          <p:nvPr/>
+        </p:nvSpPr>
+        <p:spPr>
+          <a:xfrm>
+            <a:off x="5684363" y="2195016"/>
+            <a:ext cx="4967925" cy="923330"/>
+          </a:xfrm>
+          <a:prstGeom prst="rect">
+            <a:avLst/>
+          </a:prstGeom>
+          <a:noFill/>
+        </p:spPr>
+        <p:txBody>
+          <a:bodyPr wrap="square" rtlCol="0">
+            <a:spAutoFit/>
+          </a:bodyPr>
+          <a:lstStyle/>
+          <a:p>
+            <a:r>
+              <a:rPr lang="fr-CA" dirty="0"/>
+              <a:t>L’API est lancée en local. Le serveur Flask fonctionne sur le port 5000. Cela permet de tester les prédictions en temps réel. </a:t>
+            </a:r>
+          </a:p>
+        </p:txBody>
+      </p:sp>
     </p:spTree>
     <p:extLst>
       <p:ext uri="{BB962C8B-B14F-4D97-AF65-F5344CB8AC3E}">
@@ -3546,8 +3614,8 @@
         </p:nvSpPr>
         <p:spPr>
           <a:xfrm>
-            <a:off x="2301923" y="1482602"/>
-            <a:ext cx="7588155" cy="2236264"/>
+            <a:off x="-309301" y="214073"/>
+            <a:ext cx="5833409" cy="1031602"/>
           </a:xfrm>
         </p:spPr>
         <p:txBody>
@@ -3580,39 +3648,349 @@
           </a:p>
         </p:txBody>
       </p:sp>
+      <p:pic>
+        <p:nvPicPr>
+          <p:cNvPr id="6" name="Image 5" descr="The image displays a web browser window showing a 405 Method Not Allowed error message, indicating the user's request to access a URL was not permitted.&#10;&#10;Le contenu généré par l’IA peut être incorrect.">
+            <a:extLst>
+              <a:ext uri="{FF2B5EF4-FFF2-40B4-BE49-F238E27FC236}">
+                <a16:creationId xmlns:a16="http://schemas.microsoft.com/office/drawing/2014/main" id="{7446B4EA-4E4F-00D4-5BB9-95CC70AB5D74}"/>
+              </a:ext>
+            </a:extLst>
+          </p:cNvPr>
+          <p:cNvPicPr>
+            <a:picLocks noChangeAspect="1"/>
+          </p:cNvPicPr>
+          <p:nvPr/>
+        </p:nvPicPr>
+        <p:blipFill>
+          <a:blip r:embed="rId3"/>
+          <a:stretch>
+            <a:fillRect/>
+          </a:stretch>
+        </p:blipFill>
+        <p:spPr>
+          <a:xfrm>
+            <a:off x="300960" y="3429000"/>
+            <a:ext cx="4364559" cy="2565532"/>
+          </a:xfrm>
+          <a:prstGeom prst="rect">
+            <a:avLst/>
+          </a:prstGeom>
+        </p:spPr>
+      </p:pic>
+      <p:pic>
+        <p:nvPicPr>
+          <p:cNvPr id="8" name="Image 7" descr="The image shows a computer screen displaying a web address (127.0.0.1:5000) with a series of error messages and a reference to an API (SOM Video Management) being active.&#10;&#10;Le contenu généré par l’IA peut être incorrect.">
+            <a:extLst>
+              <a:ext uri="{FF2B5EF4-FFF2-40B4-BE49-F238E27FC236}">
+                <a16:creationId xmlns:a16="http://schemas.microsoft.com/office/drawing/2014/main" id="{9577BE9A-41D8-306E-7E7E-3DF2F569D798}"/>
+              </a:ext>
+            </a:extLst>
+          </p:cNvPr>
+          <p:cNvPicPr>
+            <a:picLocks noChangeAspect="1"/>
+          </p:cNvPicPr>
+          <p:nvPr/>
+        </p:nvPicPr>
+        <p:blipFill>
+          <a:blip r:embed="rId4"/>
+          <a:stretch>
+            <a:fillRect/>
+          </a:stretch>
+        </p:blipFill>
+        <p:spPr>
+          <a:xfrm>
+            <a:off x="5725539" y="1493560"/>
+            <a:ext cx="4230056" cy="3273322"/>
+          </a:xfrm>
+          <a:prstGeom prst="rect">
+            <a:avLst/>
+          </a:prstGeom>
+        </p:spPr>
+      </p:pic>
       <p:sp>
         <p:nvSpPr>
-          <p:cNvPr id="3" name="Sous-titre 2">
-            <a:extLst>
-              <a:ext uri="{FF2B5EF4-FFF2-40B4-BE49-F238E27FC236}">
-                <a16:creationId xmlns:a16="http://schemas.microsoft.com/office/drawing/2014/main" id="{F4ECA444-FE09-E398-10B8-C4ED98F4439B}"/>
+          <p:cNvPr id="9" name="Rectangle 1">
+            <a:extLst>
+              <a:ext uri="{FF2B5EF4-FFF2-40B4-BE49-F238E27FC236}">
+                <a16:creationId xmlns:a16="http://schemas.microsoft.com/office/drawing/2014/main" id="{7E50DABD-CA26-F12E-BD16-CEB793F56EDE}"/>
               </a:ext>
             </a:extLst>
           </p:cNvPr>
           <p:cNvSpPr>
-            <a:spLocks noGrp="1"/>
+            <a:spLocks noGrp="1" noChangeArrowheads="1"/>
           </p:cNvSpPr>
           <p:nvPr>
             <p:ph type="subTitle" idx="1"/>
           </p:nvPr>
         </p:nvSpPr>
-        <p:spPr>
-          <a:xfrm>
-            <a:off x="2301923" y="3793937"/>
-            <a:ext cx="7588155" cy="1414091"/>
-          </a:xfrm>
+        <p:spPr bwMode="auto">
+          <a:xfrm>
+            <a:off x="-1" y="1189843"/>
+            <a:ext cx="4230056" cy="2031325"/>
+          </a:xfrm>
+          <a:prstGeom prst="rect">
+            <a:avLst/>
+          </a:prstGeom>
+          <a:noFill/>
+          <a:ln>
+            <a:noFill/>
+          </a:ln>
+          <a:effectLst/>
+          <a:extLst>
+            <a:ext uri="{909E8E84-426E-40DD-AFC4-6F175D3DCCD1}">
+              <a14:hiddenFill xmlns:a14="http://schemas.microsoft.com/office/drawing/2010/main">
+                <a:solidFill>
+                  <a:schemeClr val="accent1"/>
+                </a:solidFill>
+              </a14:hiddenFill>
+            </a:ext>
+            <a:ext uri="{91240B29-F687-4F45-9708-019B960494DF}">
+              <a14:hiddenLine xmlns:a14="http://schemas.microsoft.com/office/drawing/2010/main" w="9525">
+                <a:solidFill>
+                  <a:schemeClr val="tx1"/>
+                </a:solidFill>
+                <a:miter lim="800000"/>
+                <a:headEnd/>
+                <a:tailEnd/>
+              </a14:hiddenLine>
+            </a:ext>
+            <a:ext uri="{AF507438-7753-43E0-B8FC-AC1667EBCBE1}">
+              <a14:hiddenEffects xmlns:a14="http://schemas.microsoft.com/office/drawing/2010/main">
+                <a:effectLst>
+                  <a:outerShdw dist="35921" dir="2700000" algn="ctr" rotWithShape="0">
+                    <a:schemeClr val="bg2"/>
+                  </a:outerShdw>
+                </a:effectLst>
+              </a14:hiddenEffects>
+            </a:ext>
+          </a:extLst>
         </p:spPr>
         <p:txBody>
-          <a:bodyPr>
-            <a:normAutofit/>
+          <a:bodyPr vert="horz" wrap="square" lIns="91440" tIns="45720" rIns="91440" bIns="45720" numCol="1" anchor="ctr" anchorCtr="0" compatLnSpc="1">
+            <a:prstTxWarp prst="textNoShape">
+              <a:avLst/>
+            </a:prstTxWarp>
+            <a:spAutoFit/>
           </a:bodyPr>
           <a:lstStyle/>
           <a:p>
-            <a:endParaRPr lang="en-CA" sz="2200" dirty="0">
+            <a:pPr marL="0" marR="0" lvl="0" indent="0" algn="l" defTabSz="914400" rtl="0" eaLnBrk="0" fontAlgn="base" latinLnBrk="0" hangingPunct="0">
+              <a:lnSpc>
+                <a:spcPct val="100000"/>
+              </a:lnSpc>
+              <a:spcBef>
+                <a:spcPct val="0"/>
+              </a:spcBef>
+              <a:spcAft>
+                <a:spcPct val="0"/>
+              </a:spcAft>
+              <a:buClrTx/>
+              <a:buSzTx/>
+              <a:buFontTx/>
+              <a:buNone/>
+              <a:tabLst/>
+            </a:pPr>
+            <a:endParaRPr kumimoji="0" lang="fr-FR" altLang="fr-FR" sz="1800" b="0" i="0" u="none" strike="noStrike" cap="none" normalizeH="0" baseline="0">
+              <a:ln>
+                <a:noFill/>
+              </a:ln>
               <a:solidFill>
-                <a:srgbClr val="FFFFFF"/>
+                <a:schemeClr val="tx1"/>
               </a:solidFill>
+              <a:effectLst/>
+              <a:latin typeface="Arial" panose="020B0604020202020204" pitchFamily="34" charset="0"/>
             </a:endParaRPr>
+          </a:p>
+          <a:p>
+            <a:pPr marL="0" marR="0" lvl="0" indent="0" algn="l" defTabSz="914400" rtl="0" eaLnBrk="0" fontAlgn="base" latinLnBrk="0" hangingPunct="0">
+              <a:lnSpc>
+                <a:spcPct val="100000"/>
+              </a:lnSpc>
+              <a:spcBef>
+                <a:spcPct val="0"/>
+              </a:spcBef>
+              <a:spcAft>
+                <a:spcPct val="0"/>
+              </a:spcAft>
+              <a:buClrTx/>
+              <a:buSzTx/>
+              <a:buFontTx/>
+              <a:buChar char="•"/>
+              <a:tabLst/>
+            </a:pPr>
+            <a:r>
+              <a:rPr kumimoji="0" lang="fr-FR" altLang="fr-FR" sz="1800" b="0" i="0" u="none" strike="noStrike" cap="none" normalizeH="0" baseline="0">
+                <a:ln>
+                  <a:noFill/>
+                </a:ln>
+                <a:solidFill>
+                  <a:schemeClr val="tx1"/>
+                </a:solidFill>
+                <a:effectLst/>
+                <a:latin typeface="Arial" panose="020B0604020202020204" pitchFamily="34" charset="0"/>
+              </a:rPr>
+              <a:t>Ajouter une interface web simple </a:t>
+            </a:r>
+          </a:p>
+          <a:p>
+            <a:pPr marL="0" marR="0" lvl="0" indent="0" algn="l" defTabSz="914400" rtl="0" eaLnBrk="0" fontAlgn="base" latinLnBrk="0" hangingPunct="0">
+              <a:lnSpc>
+                <a:spcPct val="100000"/>
+              </a:lnSpc>
+              <a:spcBef>
+                <a:spcPct val="0"/>
+              </a:spcBef>
+              <a:spcAft>
+                <a:spcPct val="0"/>
+              </a:spcAft>
+              <a:buClrTx/>
+              <a:buSzTx/>
+              <a:buFontTx/>
+              <a:buChar char="•"/>
+              <a:tabLst/>
+            </a:pPr>
+            <a:r>
+              <a:rPr kumimoji="0" lang="fr-FR" altLang="fr-FR" sz="1800" b="0" i="0" u="none" strike="noStrike" cap="none" normalizeH="0" baseline="0">
+                <a:ln>
+                  <a:noFill/>
+                </a:ln>
+                <a:solidFill>
+                  <a:schemeClr val="tx1"/>
+                </a:solidFill>
+                <a:effectLst/>
+                <a:latin typeface="Arial" panose="020B0604020202020204" pitchFamily="34" charset="0"/>
+              </a:rPr>
+              <a:t>Permettre test direct dans le navigateur </a:t>
+            </a:r>
+          </a:p>
+          <a:p>
+            <a:pPr marL="0" marR="0" lvl="0" indent="0" algn="l" defTabSz="914400" rtl="0" eaLnBrk="0" fontAlgn="base" latinLnBrk="0" hangingPunct="0">
+              <a:lnSpc>
+                <a:spcPct val="100000"/>
+              </a:lnSpc>
+              <a:spcBef>
+                <a:spcPct val="0"/>
+              </a:spcBef>
+              <a:spcAft>
+                <a:spcPct val="0"/>
+              </a:spcAft>
+              <a:buClrTx/>
+              <a:buSzTx/>
+              <a:buFontTx/>
+              <a:buChar char="•"/>
+              <a:tabLst/>
+            </a:pPr>
+            <a:r>
+              <a:rPr kumimoji="0" lang="fr-FR" altLang="fr-FR" sz="1800" b="0" i="0" u="none" strike="noStrike" cap="none" normalizeH="0" baseline="0">
+                <a:ln>
+                  <a:noFill/>
+                </a:ln>
+                <a:solidFill>
+                  <a:schemeClr val="tx1"/>
+                </a:solidFill>
+                <a:effectLst/>
+                <a:latin typeface="Arial" panose="020B0604020202020204" pitchFamily="34" charset="0"/>
+              </a:rPr>
+              <a:t>Ajouter validation des entrées </a:t>
+            </a:r>
+          </a:p>
+          <a:p>
+            <a:pPr marL="0" marR="0" lvl="0" indent="0" algn="l" defTabSz="914400" rtl="0" eaLnBrk="0" fontAlgn="base" latinLnBrk="0" hangingPunct="0">
+              <a:lnSpc>
+                <a:spcPct val="100000"/>
+              </a:lnSpc>
+              <a:spcBef>
+                <a:spcPct val="0"/>
+              </a:spcBef>
+              <a:spcAft>
+                <a:spcPct val="0"/>
+              </a:spcAft>
+              <a:buClrTx/>
+              <a:buSzTx/>
+              <a:buFontTx/>
+              <a:buChar char="•"/>
+              <a:tabLst/>
+            </a:pPr>
+            <a:r>
+              <a:rPr kumimoji="0" lang="fr-FR" altLang="fr-FR" sz="1800" b="0" i="0" u="none" strike="noStrike" cap="none" normalizeH="0" baseline="0">
+                <a:ln>
+                  <a:noFill/>
+                </a:ln>
+                <a:solidFill>
+                  <a:schemeClr val="tx1"/>
+                </a:solidFill>
+                <a:effectLst/>
+                <a:latin typeface="Arial" panose="020B0604020202020204" pitchFamily="34" charset="0"/>
+              </a:rPr>
+              <a:t>Gérer les erreurs </a:t>
+            </a:r>
+          </a:p>
+          <a:p>
+            <a:pPr marL="0" marR="0" lvl="0" indent="0" algn="l" defTabSz="914400" rtl="0" eaLnBrk="0" fontAlgn="base" latinLnBrk="0" hangingPunct="0">
+              <a:lnSpc>
+                <a:spcPct val="100000"/>
+              </a:lnSpc>
+              <a:spcBef>
+                <a:spcPct val="0"/>
+              </a:spcBef>
+              <a:spcAft>
+                <a:spcPct val="0"/>
+              </a:spcAft>
+              <a:buClrTx/>
+              <a:buSzTx/>
+              <a:buFontTx/>
+              <a:buChar char="•"/>
+              <a:tabLst/>
+            </a:pPr>
+            <a:r>
+              <a:rPr kumimoji="0" lang="fr-FR" altLang="fr-FR" sz="1800" b="0" i="0" u="none" strike="noStrike" cap="none" normalizeH="0" baseline="0">
+                <a:ln>
+                  <a:noFill/>
+                </a:ln>
+                <a:solidFill>
+                  <a:schemeClr val="tx1"/>
+                </a:solidFill>
+                <a:effectLst/>
+                <a:latin typeface="Arial" panose="020B0604020202020204" pitchFamily="34" charset="0"/>
+              </a:rPr>
+              <a:t>Déployer sur le cloud </a:t>
+            </a:r>
+          </a:p>
+        </p:txBody>
+      </p:sp>
+      <p:sp>
+        <p:nvSpPr>
+          <p:cNvPr id="10" name="ZoneTexte 9">
+            <a:extLst>
+              <a:ext uri="{FF2B5EF4-FFF2-40B4-BE49-F238E27FC236}">
+                <a16:creationId xmlns:a16="http://schemas.microsoft.com/office/drawing/2014/main" id="{05AD8DAA-E8F9-D3F7-F6FB-7F1534E1ACE5}"/>
+              </a:ext>
+            </a:extLst>
+          </p:cNvPr>
+          <p:cNvSpPr txBox="1"/>
+          <p:nvPr/>
+        </p:nvSpPr>
+        <p:spPr>
+          <a:xfrm>
+            <a:off x="5823235" y="5071202"/>
+            <a:ext cx="4858224" cy="923330"/>
+          </a:xfrm>
+          <a:prstGeom prst="rect">
+            <a:avLst/>
+          </a:prstGeom>
+          <a:noFill/>
+        </p:spPr>
+        <p:txBody>
+          <a:bodyPr wrap="square" rtlCol="0">
+            <a:spAutoFit/>
+          </a:bodyPr>
+          <a:lstStyle/>
+          <a:p>
+            <a:r>
+              <a:rPr lang="fr-CA" dirty="0"/>
+              <a:t>Le système fonctionne, mais il nécessite des améliorations pour être plus précis et plus facile à utiliser.</a:t>
+            </a:r>
           </a:p>
         </p:txBody>
       </p:sp>

--- a/RecFilmsUA3.pptx
+++ b/RecFilmsUA3.pptx
@@ -2229,12 +2229,12 @@
           <a:chExt cx="0" cy="0"/>
         </a:xfrm>
       </p:grpSpPr>
-      <p:sp useBgFill="1">
+      <p:sp>
         <p:nvSpPr>
-          <p:cNvPr id="31" name="Rectangle 30">
-            <a:extLst>
-              <a:ext uri="{FF2B5EF4-FFF2-40B4-BE49-F238E27FC236}">
-                <a16:creationId xmlns:a16="http://schemas.microsoft.com/office/drawing/2014/main" id="{2A54C444-C9D4-8C66-791E-B09D442031DF}"/>
+          <p:cNvPr id="36" name="Rectangle 35">
+            <a:extLst>
+              <a:ext uri="{FF2B5EF4-FFF2-40B4-BE49-F238E27FC236}">
+                <a16:creationId xmlns:a16="http://schemas.microsoft.com/office/drawing/2014/main" id="{21E0DC6F-DB0E-DBE1-8178-AE81BC6B96EA}"/>
               </a:ext>
               <a:ext uri="{C183D7F6-B498-43B3-948B-1728B52AA6E4}">
                 <adec:decorative xmlns:adec="http://schemas.microsoft.com/office/drawing/2017/decorative" val="1"/>
@@ -2260,6 +2260,9 @@
           <a:prstGeom prst="rect">
             <a:avLst/>
           </a:prstGeom>
+          <a:solidFill>
+            <a:schemeClr val="bg1"/>
+          </a:solidFill>
           <a:ln w="12700" cap="flat" cmpd="sng" algn="ctr">
             <a:noFill/>
             <a:prstDash val="solid"/>
@@ -2320,24 +2323,87 @@
           <p:nvPr/>
         </p:nvPicPr>
         <p:blipFill>
-          <a:blip r:embed="rId2">
-            <a:alphaModFix amt="60000"/>
-          </a:blip>
-          <a:srcRect t="14243" b="6252"/>
+          <a:blip r:embed="rId2"/>
+          <a:srcRect t="17269" r="9091" b="10454"/>
           <a:stretch>
             <a:fillRect/>
           </a:stretch>
         </p:blipFill>
         <p:spPr>
           <a:xfrm>
-            <a:off x="1" y="1"/>
-            <a:ext cx="12192000" cy="6857999"/>
+            <a:off x="20" y="10"/>
+            <a:ext cx="12191980" cy="6857990"/>
           </a:xfrm>
           <a:prstGeom prst="rect">
             <a:avLst/>
           </a:prstGeom>
         </p:spPr>
       </p:pic>
+      <p:sp>
+        <p:nvSpPr>
+          <p:cNvPr id="38" name="Rectangle 37">
+            <a:extLst>
+              <a:ext uri="{FF2B5EF4-FFF2-40B4-BE49-F238E27FC236}">
+                <a16:creationId xmlns:a16="http://schemas.microsoft.com/office/drawing/2014/main" id="{84D07BF5-D29E-918E-55FE-747AF2A0E23F}"/>
+              </a:ext>
+              <a:ext uri="{C183D7F6-B498-43B3-948B-1728B52AA6E4}">
+                <adec:decorative xmlns:adec="http://schemas.microsoft.com/office/drawing/2017/decorative" val="1"/>
+              </a:ext>
+            </a:extLst>
+          </p:cNvPr>
+          <p:cNvSpPr>
+            <a:spLocks noGrp="1" noRot="1" noChangeAspect="1" noMove="1" noResize="1" noEditPoints="1" noAdjustHandles="1" noChangeArrowheads="1" noChangeShapeType="1" noTextEdit="1"/>
+          </p:cNvSpPr>
+          <p:nvPr>
+            <p:extLst>
+              <p:ext uri="{386F3935-93C4-4BCD-93E2-E3B085C9AB24}">
+                <p16:designElem xmlns:p16="http://schemas.microsoft.com/office/powerpoint/2015/main" val="1"/>
+              </p:ext>
+            </p:extLst>
+          </p:nvPr>
+        </p:nvSpPr>
+        <p:spPr>
+          <a:xfrm>
+            <a:off x="0" y="0"/>
+            <a:ext cx="4366726" cy="6858001"/>
+          </a:xfrm>
+          <a:prstGeom prst="rect">
+            <a:avLst/>
+          </a:prstGeom>
+          <a:solidFill>
+            <a:schemeClr val="bg1">
+              <a:alpha val="70000"/>
+            </a:schemeClr>
+          </a:solidFill>
+          <a:ln>
+            <a:noFill/>
+          </a:ln>
+        </p:spPr>
+        <p:style>
+          <a:lnRef idx="2">
+            <a:schemeClr val="accent1">
+              <a:shade val="50000"/>
+            </a:schemeClr>
+          </a:lnRef>
+          <a:fillRef idx="1">
+            <a:schemeClr val="accent1"/>
+          </a:fillRef>
+          <a:effectRef idx="0">
+            <a:schemeClr val="accent1"/>
+          </a:effectRef>
+          <a:fontRef idx="minor">
+            <a:schemeClr val="lt1"/>
+          </a:fontRef>
+        </p:style>
+        <p:txBody>
+          <a:bodyPr rtlCol="0" anchor="ctr"/>
+          <a:lstStyle/>
+          <a:p>
+            <a:pPr algn="ctr"/>
+            <a:endParaRPr lang="en-US"/>
+          </a:p>
+        </p:txBody>
+      </p:sp>
       <p:sp>
         <p:nvSpPr>
           <p:cNvPr id="2" name="Titre 1">
@@ -2356,22 +2422,19 @@
         </p:nvSpPr>
         <p:spPr>
           <a:xfrm>
-            <a:off x="2301923" y="1482602"/>
-            <a:ext cx="7588155" cy="2236264"/>
+            <a:off x="441035" y="1424475"/>
+            <a:ext cx="3424383" cy="2543448"/>
           </a:xfrm>
         </p:spPr>
         <p:txBody>
-          <a:bodyPr>
+          <a:bodyPr anchor="t">
             <a:normAutofit/>
           </a:bodyPr>
           <a:lstStyle/>
           <a:p>
-            <a:r>
-              <a:rPr lang="en-CA" sz="5400" dirty="0">
-                <a:solidFill>
-                  <a:srgbClr val="FFFFFF"/>
-                </a:solidFill>
-              </a:rPr>
+            <a:pPr algn="l"/>
+            <a:r>
+              <a:rPr lang="en-CA" sz="3200"/>
               <a:t>KNN</a:t>
             </a:r>
           </a:p>
@@ -2395,40 +2458,135 @@
         </p:nvSpPr>
         <p:spPr>
           <a:xfrm>
-            <a:off x="2301923" y="3793937"/>
-            <a:ext cx="7588155" cy="1414091"/>
+            <a:off x="480697" y="1308845"/>
+            <a:ext cx="3424382" cy="2000041"/>
           </a:xfrm>
         </p:spPr>
         <p:txBody>
-          <a:bodyPr>
+          <a:bodyPr anchor="b">
             <a:normAutofit/>
           </a:bodyPr>
           <a:lstStyle/>
           <a:p>
-            <a:r>
-              <a:rPr lang="en-CA" sz="2200" dirty="0">
-                <a:solidFill>
-                  <a:srgbClr val="FFFFFF"/>
-                </a:solidFill>
-              </a:rPr>
-              <a:t>Introduction a un 2e Dataset, Matrice, RMSE, Genre et </a:t>
-            </a:r>
-            <a:r>
-              <a:rPr lang="en-CA" sz="2200" dirty="0" err="1">
-                <a:solidFill>
-                  <a:srgbClr val="FFFFFF"/>
-                </a:solidFill>
-              </a:rPr>
+            <a:pPr algn="l"/>
+            <a:r>
+              <a:rPr lang="en-CA" dirty="0"/>
+              <a:t>Introduction a un 2e Dataset, Matrice, RMSE, Genre, </a:t>
+            </a:r>
+            <a:r>
+              <a:rPr lang="en-CA" dirty="0" err="1"/>
               <a:t>Suraprentissage</a:t>
             </a:r>
-            <a:endParaRPr lang="en-CA" sz="2200" dirty="0">
-              <a:solidFill>
-                <a:srgbClr val="FFFFFF"/>
-              </a:solidFill>
-            </a:endParaRPr>
+            <a:r>
+              <a:rPr lang="en-CA" dirty="0"/>
+              <a:t> et Wizard of Oz</a:t>
+            </a:r>
           </a:p>
         </p:txBody>
       </p:sp>
+      <p:pic>
+        <p:nvPicPr>
+          <p:cNvPr id="6" name="Image 5">
+            <a:extLst>
+              <a:ext uri="{FF2B5EF4-FFF2-40B4-BE49-F238E27FC236}">
+                <a16:creationId xmlns:a16="http://schemas.microsoft.com/office/drawing/2014/main" id="{B86E8D80-19EB-6EAD-527C-BA2135A7320B}"/>
+              </a:ext>
+            </a:extLst>
+          </p:cNvPr>
+          <p:cNvPicPr>
+            <a:picLocks noChangeAspect="1"/>
+          </p:cNvPicPr>
+          <p:nvPr/>
+        </p:nvPicPr>
+        <p:blipFill>
+          <a:blip r:embed="rId3"/>
+          <a:stretch>
+            <a:fillRect/>
+          </a:stretch>
+        </p:blipFill>
+        <p:spPr>
+          <a:xfrm>
+            <a:off x="4579357" y="0"/>
+            <a:ext cx="7493702" cy="3181974"/>
+          </a:xfrm>
+          <a:prstGeom prst="rect">
+            <a:avLst/>
+          </a:prstGeom>
+        </p:spPr>
+      </p:pic>
+      <p:pic>
+        <p:nvPicPr>
+          <p:cNvPr id="10" name="Image 9">
+            <a:extLst>
+              <a:ext uri="{FF2B5EF4-FFF2-40B4-BE49-F238E27FC236}">
+                <a16:creationId xmlns:a16="http://schemas.microsoft.com/office/drawing/2014/main" id="{F363DD33-185F-3158-7C04-A8FE81D89614}"/>
+              </a:ext>
+            </a:extLst>
+          </p:cNvPr>
+          <p:cNvPicPr>
+            <a:picLocks noChangeAspect="1"/>
+          </p:cNvPicPr>
+          <p:nvPr/>
+        </p:nvPicPr>
+        <p:blipFill>
+          <a:blip r:embed="rId4"/>
+          <a:stretch>
+            <a:fillRect/>
+          </a:stretch>
+        </p:blipFill>
+        <p:spPr>
+          <a:xfrm>
+            <a:off x="4579356" y="3181985"/>
+            <a:ext cx="7493702" cy="3676016"/>
+          </a:xfrm>
+          <a:prstGeom prst="rect">
+            <a:avLst/>
+          </a:prstGeom>
+        </p:spPr>
+      </p:pic>
+      <p:pic>
+        <p:nvPicPr>
+          <p:cNvPr id="14" name="Image 13">
+            <a:extLst>
+              <a:ext uri="{FF2B5EF4-FFF2-40B4-BE49-F238E27FC236}">
+                <a16:creationId xmlns:a16="http://schemas.microsoft.com/office/drawing/2014/main" id="{874D2A99-B3A8-51BF-AF1E-FB0F6288E0C1}"/>
+              </a:ext>
+            </a:extLst>
+          </p:cNvPr>
+          <p:cNvPicPr>
+            <a:picLocks noChangeAspect="1"/>
+          </p:cNvPicPr>
+          <p:nvPr/>
+        </p:nvPicPr>
+        <p:blipFill>
+          <a:blip r:embed="rId5"/>
+          <a:stretch>
+            <a:fillRect/>
+          </a:stretch>
+        </p:blipFill>
+        <p:spPr>
+          <a:xfrm>
+            <a:off x="212650" y="3613216"/>
+            <a:ext cx="3960476" cy="2240269"/>
+          </a:xfrm>
+          <a:prstGeom prst="roundRect">
+            <a:avLst>
+              <a:gd name="adj" fmla="val 8594"/>
+            </a:avLst>
+          </a:prstGeom>
+          <a:solidFill>
+            <a:srgbClr val="FFFFFF">
+              <a:shade val="85000"/>
+            </a:srgbClr>
+          </a:solidFill>
+          <a:ln>
+            <a:noFill/>
+          </a:ln>
+          <a:effectLst>
+            <a:reflection blurRad="12700" stA="38000" endPos="28000" dist="5000" dir="5400000" sy="-100000" algn="bl" rotWithShape="0"/>
+          </a:effectLst>
+        </p:spPr>
+      </p:pic>
     </p:spTree>
     <p:extLst>
       <p:ext uri="{BB962C8B-B14F-4D97-AF65-F5344CB8AC3E}">
@@ -2437,8 +2595,147 @@
     </p:extLst>
   </p:cSld>
   <p:clrMapOvr>
-    <a:overrideClrMapping bg1="dk1" tx1="lt1" bg2="dk2" tx2="lt2" accent1="accent1" accent2="accent2" accent3="accent3" accent4="accent4" accent5="accent5" accent6="accent6" hlink="hlink" folHlink="folHlink"/>
+    <a:masterClrMapping/>
   </p:clrMapOvr>
+  <p:timing>
+    <p:tnLst>
+      <p:par>
+        <p:cTn id="1" dur="indefinite" restart="never" nodeType="tmRoot">
+          <p:childTnLst>
+            <p:seq concurrent="1" nextAc="seek">
+              <p:cTn id="2" dur="indefinite" nodeType="mainSeq">
+                <p:childTnLst>
+                  <p:par>
+                    <p:cTn id="3" fill="hold">
+                      <p:stCondLst>
+                        <p:cond delay="indefinite"/>
+                        <p:cond evt="onBegin" delay="0">
+                          <p:tn val="2"/>
+                        </p:cond>
+                      </p:stCondLst>
+                      <p:childTnLst>
+                        <p:par>
+                          <p:cTn id="4" fill="hold">
+                            <p:stCondLst>
+                              <p:cond delay="0"/>
+                            </p:stCondLst>
+                            <p:childTnLst>
+                              <p:par>
+                                <p:cTn id="5" presetID="10" presetClass="entr" presetSubtype="0" fill="hold" grpId="0" nodeType="withEffect">
+                                  <p:stCondLst>
+                                    <p:cond delay="1000"/>
+                                  </p:stCondLst>
+                                  <p:iterate type="lt">
+                                    <p:tmPct val="10000"/>
+                                  </p:iterate>
+                                  <p:childTnLst>
+                                    <p:set>
+                                      <p:cBhvr>
+                                        <p:cTn id="6" dur="1" fill="hold">
+                                          <p:stCondLst>
+                                            <p:cond delay="0"/>
+                                          </p:stCondLst>
+                                        </p:cTn>
+                                        <p:tgtEl>
+                                          <p:spTgt spid="2"/>
+                                        </p:tgtEl>
+                                        <p:attrNameLst>
+                                          <p:attrName>style.visibility</p:attrName>
+                                        </p:attrNameLst>
+                                      </p:cBhvr>
+                                      <p:to>
+                                        <p:strVal val="visible"/>
+                                      </p:to>
+                                    </p:set>
+                                    <p:animEffect transition="in" filter="fade">
+                                      <p:cBhvr>
+                                        <p:cTn id="7" dur="400"/>
+                                        <p:tgtEl>
+                                          <p:spTgt spid="2"/>
+                                        </p:tgtEl>
+                                      </p:cBhvr>
+                                    </p:animEffect>
+                                  </p:childTnLst>
+                                </p:cTn>
+                              </p:par>
+                              <p:par>
+                                <p:cTn id="8" presetID="10" presetClass="entr" presetSubtype="0" fill="hold" grpId="0" nodeType="withEffect">
+                                  <p:stCondLst>
+                                    <p:cond delay="2000"/>
+                                  </p:stCondLst>
+                                  <p:iterate type="lt">
+                                    <p:tmPct val="10000"/>
+                                  </p:iterate>
+                                  <p:childTnLst>
+                                    <p:set>
+                                      <p:cBhvr>
+                                        <p:cTn id="9" dur="1" fill="hold">
+                                          <p:stCondLst>
+                                            <p:cond delay="0"/>
+                                          </p:stCondLst>
+                                        </p:cTn>
+                                        <p:tgtEl>
+                                          <p:spTgt spid="3">
+                                            <p:txEl>
+                                              <p:pRg st="0" end="0"/>
+                                            </p:txEl>
+                                          </p:spTgt>
+                                        </p:tgtEl>
+                                        <p:attrNameLst>
+                                          <p:attrName>style.visibility</p:attrName>
+                                        </p:attrNameLst>
+                                      </p:cBhvr>
+                                      <p:to>
+                                        <p:strVal val="visible"/>
+                                      </p:to>
+                                    </p:set>
+                                    <p:animEffect transition="in" filter="fade">
+                                      <p:cBhvr>
+                                        <p:cTn id="10" dur="400"/>
+                                        <p:tgtEl>
+                                          <p:spTgt spid="3">
+                                            <p:txEl>
+                                              <p:pRg st="0" end="0"/>
+                                            </p:txEl>
+                                          </p:spTgt>
+                                        </p:tgtEl>
+                                      </p:cBhvr>
+                                    </p:animEffect>
+                                  </p:childTnLst>
+                                </p:cTn>
+                              </p:par>
+                            </p:childTnLst>
+                          </p:cTn>
+                        </p:par>
+                      </p:childTnLst>
+                    </p:cTn>
+                  </p:par>
+                </p:childTnLst>
+              </p:cTn>
+              <p:prevCondLst>
+                <p:cond evt="onPrev" delay="0">
+                  <p:tgtEl>
+                    <p:sldTgt/>
+                  </p:tgtEl>
+                </p:cond>
+              </p:prevCondLst>
+              <p:nextCondLst>
+                <p:cond evt="onNext" delay="0">
+                  <p:tgtEl>
+                    <p:sldTgt/>
+                  </p:tgtEl>
+                </p:cond>
+              </p:nextCondLst>
+            </p:seq>
+          </p:childTnLst>
+        </p:cTn>
+      </p:par>
+    </p:tnLst>
+    <p:bldLst>
+      <p:bldP spid="2" grpId="0"/>
+      <p:bldP spid="3" grpId="0" build="p"/>
+    </p:bldLst>
+  </p:timing>
 </p:sld>
 </file>
 
